--- a/スライド/ch06.pptx
+++ b/スライド/ch06.pptx
@@ -915,7 +915,7 @@
           <a:p/>
           <a:p>
             <a:r>
-              <a:t>_class: sections</a:t>
+              <a:t>_class: figure-full</a:t>
             </a:r>
           </a:p>
         </p:txBody>
@@ -985,13 +985,13 @@
           <a:lstStyle/>
           <a:p>
             <a:r>
-              <a:t>②から③へ落とすとき「虚部は位相をずらすだけ」と言う。第3回の P–δ / Q–V 分離と同じ構造。</a:t>
+              <a:t>前の 1 枚に ② を足しただけ。薄い段はまだ出していない段。</a:t>
             </a:r>
           </a:p>
           <a:p/>
           <a:p>
             <a:r>
-              <a:t>_class: sections</a:t>
+              <a:t>_class: figure-full</a:t>
             </a:r>
           </a:p>
         </p:txBody>
@@ -1061,13 +1061,13 @@
           <a:lstStyle/>
           <a:p>
             <a:r>
-              <a:t>②から③へ落とすとき「虚部は位相をずらすだけ」と言う。第3回の P–δ / Q–V 分離と同じ構造。</a:t>
+              <a:t>前の 1 枚に ③ を足しただけ。薄い段はまだ出していない段。</a:t>
             </a:r>
           </a:p>
           <a:p/>
           <a:p>
             <a:r>
-              <a:t>_class: sections</a:t>
+              <a:t>_class: figure-full</a:t>
             </a:r>
           </a:p>
         </p:txBody>
@@ -1517,7 +1517,7 @@
           <a:p/>
           <a:p>
             <a:r>
-              <a:t>_class: sections</a:t>
+              <a:t>_class: figure-full</a:t>
             </a:r>
           </a:p>
         </p:txBody>
@@ -1587,13 +1587,13 @@
           <a:lstStyle/>
           <a:p>
             <a:r>
-              <a:t>「解が無い」＝計算機のバグではなく物理。NR 法は無い解を探して発散する。</a:t>
+              <a:t>前の 1 枚に ② を足しただけ。薄い段はまだ出していない段。</a:t>
             </a:r>
           </a:p>
           <a:p/>
           <a:p>
             <a:r>
-              <a:t>_class: sections</a:t>
+              <a:t>_class: figure-full</a:t>
             </a:r>
           </a:p>
         </p:txBody>
@@ -1663,13 +1663,13 @@
           <a:lstStyle/>
           <a:p>
             <a:r>
-              <a:t>「解が無い」＝計算機のバグではなく物理。NR 法は無い解を探して発散する。</a:t>
+              <a:t>前の 1 枚に ③ を足しただけ。薄い段はまだ出していない段。</a:t>
             </a:r>
           </a:p>
           <a:p/>
           <a:p>
             <a:r>
-              <a:t>_class: sections</a:t>
+              <a:t>_class: figure-full</a:t>
             </a:r>
           </a:p>
         </p:txBody>
@@ -8607,59 +8607,14 @@
       <p:grpSpPr/>
       <p:sp>
         <p:nvSpPr>
-          <p:cNvPr id="2" name="TextBox 1"/>
+          <p:cNvPr id="2" name="edge:title"/>
           <p:cNvSpPr txBox="1"/>
           <p:nvPr/>
         </p:nvSpPr>
         <p:spPr>
           <a:xfrm>
-            <a:off x="566928" y="457200"/>
-            <a:ext cx="11057839" cy="658368"/>
-          </a:xfrm>
-          <a:prstGeom prst="rect">
-            <a:avLst/>
-          </a:prstGeom>
-          <a:noFill/>
-        </p:spPr>
-        <p:txBody>
-          <a:bodyPr wrap="square" lIns="0" rIns="0" tIns="0" bIns="0" anchor="ctr">
-            <a:noAutofit/>
-          </a:bodyPr>
-          <a:lstStyle/>
-          <a:p>
-            <a:pPr>
-              <a:lnSpc>
-                <a:spcPct val="106000"/>
-              </a:lnSpc>
-              <a:defRPr sz="3390" b="1">
-                <a:solidFill>
-                  <a:srgbClr val="7C332A"/>
-                </a:solidFill>
-                <a:latin typeface="Avenir Next"/>
-                <a:ea typeface="Hiragino Sans"/>
-                <a:cs typeface="Hiragino Sans"/>
-              </a:defRPr>
-            </a:pPr>
-            <a:r>
-              <a:rPr>
-                <a:ea typeface="Hiragino Sans"/>
-                <a:cs typeface="Hiragino Sans"/>
-              </a:rPr>
-              <a:t>導出 — 電圧降下の近似式</a:t>
-            </a:r>
-          </a:p>
-        </p:txBody>
-      </p:sp>
-      <p:sp>
-        <p:nvSpPr>
-          <p:cNvPr id="3" name="TextBox 2"/>
-          <p:cNvSpPr txBox="1"/>
-          <p:nvPr/>
-        </p:nvSpPr>
-        <p:spPr>
-          <a:xfrm>
-            <a:off x="566928" y="2384775"/>
-            <a:ext cx="11057839" cy="254000"/>
+            <a:off x="566928" y="146304"/>
+            <a:ext cx="11057839" cy="457200"/>
           </a:xfrm>
           <a:prstGeom prst="rect">
             <a:avLst/>
@@ -8672,30 +8627,60 @@
           </a:bodyPr>
           <a:lstStyle/>
           <a:p>
-            <a:r>
-              <a:rPr sz="1600" b="1">
-                <a:solidFill>
-                  <a:srgbClr val="5C7268"/>
-                </a:solidFill>
-                <a:latin typeface="Avenir Next"/>
-                <a:ea typeface="Hiragino Sans"/>
-                <a:cs typeface="Hiragino Sans"/>
-              </a:rPr>
-              <a:t>① 線路を流れる電流｜受電端で P + jQ を消費する</a:t>
-            </a:r>
-          </a:p>
-        </p:txBody>
-      </p:sp>
-      <p:sp>
-        <p:nvSpPr>
-          <p:cNvPr id="4" name="TextBox 3"/>
+            <a:pPr>
+              <a:defRPr sz="2400" b="1">
+                <a:solidFill>
+                  <a:srgbClr val="7C332A"/>
+                </a:solidFill>
+                <a:latin typeface="Avenir Next"/>
+                <a:ea typeface="Hiragino Sans"/>
+                <a:cs typeface="Hiragino Sans"/>
+              </a:defRPr>
+            </a:pPr>
+            <a:r>
+              <a:rPr>
+                <a:ea typeface="Hiragino Sans"/>
+                <a:cs typeface="Hiragino Sans"/>
+              </a:rPr>
+              <a:t>導出 — 電圧降下の近似式</a:t>
+            </a:r>
+          </a:p>
+        </p:txBody>
+      </p:sp>
+      <p:pic>
+        <p:nvPicPr>
+          <p:cNvPr id="3" name="Picture 2" descr="ch06_deriv_dv_1.png"/>
+          <p:cNvPicPr>
+            <a:picLocks noChangeAspect="1"/>
+          </p:cNvPicPr>
+          <p:nvPr/>
+        </p:nvPicPr>
+        <p:blipFill>
+          <a:blip r:embed="rId2"/>
+          <a:stretch>
+            <a:fillRect/>
+          </a:stretch>
+        </p:blipFill>
+        <p:spPr>
+          <a:xfrm>
+            <a:off x="551856" y="713232"/>
+            <a:ext cx="11087983" cy="5532120"/>
+          </a:xfrm>
+          <a:prstGeom prst="rect">
+            <a:avLst/>
+          </a:prstGeom>
+        </p:spPr>
+      </p:pic>
+      <p:sp>
+        <p:nvSpPr>
+          <p:cNvPr id="4" name="edge:caption"/>
           <p:cNvSpPr txBox="1"/>
           <p:nvPr/>
         </p:nvSpPr>
         <p:spPr>
           <a:xfrm>
-            <a:off x="822960" y="2676875"/>
-            <a:ext cx="10801807" cy="385762"/>
+            <a:off x="228600" y="6300216"/>
+            <a:ext cx="11734495" cy="310896"/>
           </a:xfrm>
           <a:prstGeom prst="rect">
             <a:avLst/>
@@ -8708,336 +8693,24 @@
           </a:bodyPr>
           <a:lstStyle/>
           <a:p>
-            <a:pPr>
-              <a:lnSpc>
-                <a:spcPct val="130000"/>
-              </a:lnSpc>
-            </a:pPr>
-            <a:r>
-              <a:rPr sz="1500">
-                <a:solidFill>
-                  <a:srgbClr val="33221E"/>
-                </a:solidFill>
-                <a:latin typeface="Avenir Next"/>
-                <a:ea typeface="Hiragino Sans"/>
-                <a:cs typeface="Hiragino Sans"/>
-              </a:rPr>
-              <a:t>受電端電圧を V、消費を P + jQ とすると I = (P − jQ)/V*。線路は R + jX。</a:t>
-            </a:r>
-          </a:p>
-        </p:txBody>
-      </p:sp>
-      <p:sp>
-        <p:nvSpPr>
-          <p:cNvPr id="5" name="Rectangle 4"/>
-          <p:cNvSpPr/>
-          <p:nvPr/>
-        </p:nvSpPr>
-        <p:spPr>
-          <a:xfrm>
-            <a:off x="566928" y="3214529"/>
-            <a:ext cx="11057839" cy="9525"/>
-          </a:xfrm>
-          <a:prstGeom prst="rect">
-            <a:avLst/>
-          </a:prstGeom>
-          <a:solidFill>
-            <a:srgbClr val="E5DCCE"/>
-          </a:solidFill>
-          <a:ln>
-            <a:noFill/>
-          </a:ln>
-          <a:effectLst/>
-        </p:spPr>
-        <p:style>
-          <a:lnRef idx="1">
-            <a:schemeClr val="accent1"/>
-          </a:lnRef>
-          <a:fillRef idx="3">
-            <a:schemeClr val="accent1"/>
-          </a:fillRef>
-          <a:effectRef idx="2">
-            <a:schemeClr val="accent1"/>
-          </a:effectRef>
-          <a:fontRef idx="minor">
-            <a:schemeClr val="lt1"/>
-          </a:fontRef>
-        </p:style>
-        <p:txBody>
-          <a:bodyPr rtlCol="0" anchor="ctr"/>
-          <a:lstStyle/>
-          <a:p>
             <a:pPr algn="ctr"/>
-          </a:p>
-        </p:txBody>
-      </p:sp>
-      <p:sp>
-        <p:nvSpPr>
-          <p:cNvPr id="6" name="build:ghost"/>
-          <p:cNvSpPr txBox="1"/>
-          <p:nvPr/>
-        </p:nvSpPr>
-        <p:spPr>
-          <a:xfrm>
-            <a:off x="566928" y="3391821"/>
-            <a:ext cx="11057839" cy="254000"/>
-          </a:xfrm>
-          <a:prstGeom prst="rect">
-            <a:avLst/>
-          </a:prstGeom>
-          <a:noFill/>
-        </p:spPr>
-        <p:txBody>
-          <a:bodyPr wrap="none" lIns="0" rIns="0" tIns="0" bIns="0">
-            <a:noAutofit/>
-          </a:bodyPr>
-          <a:lstStyle/>
-          <a:p>
-            <a:r>
-              <a:rPr sz="1600" b="1">
-                <a:solidFill>
-                  <a:srgbClr val="C1C9C5"/>
-                </a:solidFill>
-                <a:latin typeface="Avenir Next"/>
-                <a:ea typeface="Hiragino Sans"/>
-                <a:cs typeface="Hiragino Sans"/>
-              </a:rPr>
-              <a:t>② 電圧降下｜ΔV = (R + jX)·I を実部と虚部に分ける</a:t>
-            </a:r>
-          </a:p>
-        </p:txBody>
-      </p:sp>
-      <p:sp>
-        <p:nvSpPr>
-          <p:cNvPr id="7" name="build:ghost"/>
-          <p:cNvSpPr txBox="1"/>
-          <p:nvPr/>
-        </p:nvSpPr>
-        <p:spPr>
-          <a:xfrm>
-            <a:off x="822960" y="3683921"/>
-            <a:ext cx="10801807" cy="385762"/>
-          </a:xfrm>
-          <a:prstGeom prst="rect">
-            <a:avLst/>
-          </a:prstGeom>
-          <a:noFill/>
-        </p:spPr>
-        <p:txBody>
-          <a:bodyPr wrap="square" lIns="0" rIns="0" tIns="0" bIns="0">
-            <a:noAutofit/>
-          </a:bodyPr>
-          <a:lstStyle/>
-          <a:p>
-            <a:pPr>
-              <a:lnSpc>
-                <a:spcPct val="130000"/>
-              </a:lnSpc>
-            </a:pPr>
-            <a:r>
-              <a:rPr sz="1500">
-                <a:solidFill>
-                  <a:srgbClr val="C1BCBB"/>
-                </a:solidFill>
-                <a:latin typeface="Avenir Next"/>
-                <a:ea typeface="Hiragino Sans"/>
-                <a:cs typeface="Hiragino Sans"/>
-              </a:rPr>
-              <a:t>ΔV = (RP + XQ)/V + j(XP − RQ)/V。位相差が小さければ </a:t>
-            </a:r>
-            <a:r>
-              <a:rPr sz="1500" b="1">
-                <a:solidFill>
-                  <a:srgbClr val="C1BCBB"/>
-                </a:solidFill>
-                <a:latin typeface="Avenir Next"/>
-                <a:ea typeface="Hiragino Sans"/>
-                <a:cs typeface="Hiragino Sans"/>
-              </a:rPr>
-              <a:t>大きさの変化は実部だけ</a:t>
-            </a:r>
-            <a:r>
-              <a:rPr sz="1500">
-                <a:solidFill>
-                  <a:srgbClr val="C1BCBB"/>
-                </a:solidFill>
-                <a:latin typeface="Avenir Next"/>
-                <a:ea typeface="Hiragino Sans"/>
-                <a:cs typeface="Hiragino Sans"/>
-              </a:rPr>
-              <a:t>で決まる。</a:t>
-            </a:r>
-          </a:p>
-        </p:txBody>
-      </p:sp>
-      <p:sp>
-        <p:nvSpPr>
-          <p:cNvPr id="8" name="Rectangle 7"/>
-          <p:cNvSpPr/>
-          <p:nvPr/>
-        </p:nvSpPr>
-        <p:spPr>
-          <a:xfrm>
-            <a:off x="566928" y="4221575"/>
-            <a:ext cx="11057839" cy="9525"/>
-          </a:xfrm>
-          <a:prstGeom prst="rect">
-            <a:avLst/>
-          </a:prstGeom>
-          <a:solidFill>
-            <a:srgbClr val="E5DCCE"/>
-          </a:solidFill>
-          <a:ln>
-            <a:noFill/>
-          </a:ln>
-          <a:effectLst/>
-        </p:spPr>
-        <p:style>
-          <a:lnRef idx="1">
-            <a:schemeClr val="accent1"/>
-          </a:lnRef>
-          <a:fillRef idx="3">
-            <a:schemeClr val="accent1"/>
-          </a:fillRef>
-          <a:effectRef idx="2">
-            <a:schemeClr val="accent1"/>
-          </a:effectRef>
-          <a:fontRef idx="minor">
-            <a:schemeClr val="lt1"/>
-          </a:fontRef>
-        </p:style>
-        <p:txBody>
-          <a:bodyPr rtlCol="0" anchor="ctr"/>
-          <a:lstStyle/>
-          <a:p>
-            <a:pPr algn="ctr"/>
-          </a:p>
-        </p:txBody>
-      </p:sp>
-      <p:sp>
-        <p:nvSpPr>
-          <p:cNvPr id="9" name="build:ghost"/>
-          <p:cNvSpPr txBox="1"/>
-          <p:nvPr/>
-        </p:nvSpPr>
-        <p:spPr>
-          <a:xfrm>
-            <a:off x="566928" y="4398867"/>
-            <a:ext cx="11057839" cy="254000"/>
-          </a:xfrm>
-          <a:prstGeom prst="rect">
-            <a:avLst/>
-          </a:prstGeom>
-          <a:noFill/>
-        </p:spPr>
-        <p:txBody>
-          <a:bodyPr wrap="none" lIns="0" rIns="0" tIns="0" bIns="0">
-            <a:noAutofit/>
-          </a:bodyPr>
-          <a:lstStyle/>
-          <a:p>
-            <a:r>
-              <a:rPr sz="1600" b="1">
-                <a:solidFill>
-                  <a:srgbClr val="C1C9C5"/>
-                </a:solidFill>
-                <a:latin typeface="Avenir Next"/>
-                <a:ea typeface="Hiragino Sans"/>
-                <a:cs typeface="Hiragino Sans"/>
-              </a:rPr>
-              <a:t>③ 実用形｜ΔV ≈ (RP + XQ)/V</a:t>
-            </a:r>
-          </a:p>
-        </p:txBody>
-      </p:sp>
-      <p:sp>
-        <p:nvSpPr>
-          <p:cNvPr id="10" name="build:ghost"/>
-          <p:cNvSpPr txBox="1"/>
-          <p:nvPr/>
-        </p:nvSpPr>
-        <p:spPr>
-          <a:xfrm>
-            <a:off x="822960" y="4690967"/>
-            <a:ext cx="10801807" cy="385762"/>
-          </a:xfrm>
-          <a:prstGeom prst="rect">
-            <a:avLst/>
-          </a:prstGeom>
-          <a:noFill/>
-        </p:spPr>
-        <p:txBody>
-          <a:bodyPr wrap="square" lIns="0" rIns="0" tIns="0" bIns="0">
-            <a:noAutofit/>
-          </a:bodyPr>
-          <a:lstStyle/>
-          <a:p>
-            <a:pPr>
-              <a:lnSpc>
-                <a:spcPct val="130000"/>
-              </a:lnSpc>
-            </a:pPr>
-            <a:r>
-              <a:rPr sz="1500">
-                <a:solidFill>
-                  <a:srgbClr val="C1BCBB"/>
-                </a:solidFill>
-                <a:latin typeface="Avenir Next"/>
-                <a:ea typeface="Hiragino Sans"/>
-                <a:cs typeface="Hiragino Sans"/>
-              </a:rPr>
-              <a:t>送電線は X ≫ R なので </a:t>
-            </a:r>
-            <a:r>
-              <a:rPr sz="1500" b="1">
-                <a:solidFill>
-                  <a:srgbClr val="C1BCBB"/>
-                </a:solidFill>
-                <a:latin typeface="Avenir Next"/>
-                <a:ea typeface="Hiragino Sans"/>
-                <a:cs typeface="Hiragino Sans"/>
-              </a:rPr>
-              <a:t>XQ が支配</a:t>
-            </a:r>
-            <a:r>
-              <a:rPr sz="1500">
-                <a:solidFill>
-                  <a:srgbClr val="C1BCBB"/>
-                </a:solidFill>
-                <a:latin typeface="Avenir Next"/>
-                <a:ea typeface="Hiragino Sans"/>
-                <a:cs typeface="Hiragino Sans"/>
-              </a:rPr>
-              <a:t>。配電線は R が大きく </a:t>
-            </a:r>
-            <a:r>
-              <a:rPr sz="1500" b="1">
-                <a:solidFill>
-                  <a:srgbClr val="C1BCBB"/>
-                </a:solidFill>
-                <a:latin typeface="Avenir Next"/>
-                <a:ea typeface="Hiragino Sans"/>
-                <a:cs typeface="Hiragino Sans"/>
-              </a:rPr>
-              <a:t>RP も効く</a:t>
-            </a:r>
-            <a:r>
-              <a:rPr sz="1500">
-                <a:solidFill>
-                  <a:srgbClr val="C1BCBB"/>
-                </a:solidFill>
-                <a:latin typeface="Avenir Next"/>
-                <a:ea typeface="Hiragino Sans"/>
-                <a:cs typeface="Hiragino Sans"/>
-              </a:rPr>
-              <a:t>。だから太陽光の逆潮流（P &lt; 0）で電圧が上がる。</a:t>
-            </a:r>
-          </a:p>
-        </p:txBody>
-      </p:sp>
-      <p:sp>
-        <p:nvSpPr>
-          <p:cNvPr id="11" name="TextBox 10"/>
+            <a:r>
+              <a:rPr sz="1400">
+                <a:solidFill>
+                  <a:srgbClr val="71635B"/>
+                </a:solidFill>
+                <a:latin typeface="Avenir Next"/>
+                <a:ea typeface="Hiragino Sans"/>
+                <a:cs typeface="Hiragino Sans"/>
+              </a:rPr>
+              <a:t>受電端電圧を V、消費を P + jQ とすると I = (P − jQ)/V*。線路は R + jX。　出典｜コード/fig_ch06.py</a:t>
+            </a:r>
+          </a:p>
+        </p:txBody>
+      </p:sp>
+      <p:sp>
+        <p:nvSpPr>
+          <p:cNvPr id="5" name="TextBox 4"/>
           <p:cNvSpPr txBox="1"/>
           <p:nvPr/>
         </p:nvSpPr>
@@ -9093,59 +8766,14 @@
       <p:grpSpPr/>
       <p:sp>
         <p:nvSpPr>
-          <p:cNvPr id="2" name="TextBox 1"/>
+          <p:cNvPr id="2" name="edge:title"/>
           <p:cNvSpPr txBox="1"/>
           <p:nvPr/>
         </p:nvSpPr>
         <p:spPr>
           <a:xfrm>
-            <a:off x="566928" y="457200"/>
-            <a:ext cx="11057839" cy="658368"/>
-          </a:xfrm>
-          <a:prstGeom prst="rect">
-            <a:avLst/>
-          </a:prstGeom>
-          <a:noFill/>
-        </p:spPr>
-        <p:txBody>
-          <a:bodyPr wrap="square" lIns="0" rIns="0" tIns="0" bIns="0" anchor="ctr">
-            <a:noAutofit/>
-          </a:bodyPr>
-          <a:lstStyle/>
-          <a:p>
-            <a:pPr>
-              <a:lnSpc>
-                <a:spcPct val="106000"/>
-              </a:lnSpc>
-              <a:defRPr sz="3390" b="1">
-                <a:solidFill>
-                  <a:srgbClr val="7C332A"/>
-                </a:solidFill>
-                <a:latin typeface="Avenir Next"/>
-                <a:ea typeface="Hiragino Sans"/>
-                <a:cs typeface="Hiragino Sans"/>
-              </a:defRPr>
-            </a:pPr>
-            <a:r>
-              <a:rPr>
-                <a:ea typeface="Hiragino Sans"/>
-                <a:cs typeface="Hiragino Sans"/>
-              </a:rPr>
-              <a:t>導出 — 電圧降下の近似式</a:t>
-            </a:r>
-          </a:p>
-        </p:txBody>
-      </p:sp>
-      <p:sp>
-        <p:nvSpPr>
-          <p:cNvPr id="3" name="TextBox 2"/>
-          <p:cNvSpPr txBox="1"/>
-          <p:nvPr/>
-        </p:nvSpPr>
-        <p:spPr>
-          <a:xfrm>
-            <a:off x="566928" y="2384775"/>
-            <a:ext cx="11057839" cy="254000"/>
+            <a:off x="566928" y="146304"/>
+            <a:ext cx="11057839" cy="457200"/>
           </a:xfrm>
           <a:prstGeom prst="rect">
             <a:avLst/>
@@ -9158,30 +8786,60 @@
           </a:bodyPr>
           <a:lstStyle/>
           <a:p>
-            <a:r>
-              <a:rPr sz="1600" b="1">
-                <a:solidFill>
-                  <a:srgbClr val="5C7268"/>
-                </a:solidFill>
-                <a:latin typeface="Avenir Next"/>
-                <a:ea typeface="Hiragino Sans"/>
-                <a:cs typeface="Hiragino Sans"/>
-              </a:rPr>
-              <a:t>① 線路を流れる電流｜受電端で P + jQ を消費する</a:t>
-            </a:r>
-          </a:p>
-        </p:txBody>
-      </p:sp>
-      <p:sp>
-        <p:nvSpPr>
-          <p:cNvPr id="4" name="TextBox 3"/>
+            <a:pPr>
+              <a:defRPr sz="2400" b="1">
+                <a:solidFill>
+                  <a:srgbClr val="7C332A"/>
+                </a:solidFill>
+                <a:latin typeface="Avenir Next"/>
+                <a:ea typeface="Hiragino Sans"/>
+                <a:cs typeface="Hiragino Sans"/>
+              </a:defRPr>
+            </a:pPr>
+            <a:r>
+              <a:rPr>
+                <a:ea typeface="Hiragino Sans"/>
+                <a:cs typeface="Hiragino Sans"/>
+              </a:rPr>
+              <a:t>導出 — 電圧降下の近似式</a:t>
+            </a:r>
+          </a:p>
+        </p:txBody>
+      </p:sp>
+      <p:pic>
+        <p:nvPicPr>
+          <p:cNvPr id="3" name="Picture 2" descr="ch06_deriv_dv_2.png"/>
+          <p:cNvPicPr>
+            <a:picLocks noChangeAspect="1"/>
+          </p:cNvPicPr>
+          <p:nvPr/>
+        </p:nvPicPr>
+        <p:blipFill>
+          <a:blip r:embed="rId2"/>
+          <a:stretch>
+            <a:fillRect/>
+          </a:stretch>
+        </p:blipFill>
+        <p:spPr>
+          <a:xfrm>
+            <a:off x="551856" y="713232"/>
+            <a:ext cx="11087983" cy="5532120"/>
+          </a:xfrm>
+          <a:prstGeom prst="rect">
+            <a:avLst/>
+          </a:prstGeom>
+        </p:spPr>
+      </p:pic>
+      <p:sp>
+        <p:nvSpPr>
+          <p:cNvPr id="4" name="edge:caption"/>
           <p:cNvSpPr txBox="1"/>
           <p:nvPr/>
         </p:nvSpPr>
         <p:spPr>
           <a:xfrm>
-            <a:off x="822960" y="2676875"/>
-            <a:ext cx="10801807" cy="385762"/>
+            <a:off x="228600" y="6300216"/>
+            <a:ext cx="11734495" cy="310896"/>
           </a:xfrm>
           <a:prstGeom prst="rect">
             <a:avLst/>
@@ -9194,336 +8852,24 @@
           </a:bodyPr>
           <a:lstStyle/>
           <a:p>
-            <a:pPr>
-              <a:lnSpc>
-                <a:spcPct val="130000"/>
-              </a:lnSpc>
-            </a:pPr>
-            <a:r>
-              <a:rPr sz="1500">
-                <a:solidFill>
-                  <a:srgbClr val="33221E"/>
-                </a:solidFill>
-                <a:latin typeface="Avenir Next"/>
-                <a:ea typeface="Hiragino Sans"/>
-                <a:cs typeface="Hiragino Sans"/>
-              </a:rPr>
-              <a:t>受電端電圧を V、消費を P + jQ とすると I = (P − jQ)/V*。線路は R + jX。</a:t>
-            </a:r>
-          </a:p>
-        </p:txBody>
-      </p:sp>
-      <p:sp>
-        <p:nvSpPr>
-          <p:cNvPr id="5" name="Rectangle 4"/>
-          <p:cNvSpPr/>
-          <p:nvPr/>
-        </p:nvSpPr>
-        <p:spPr>
-          <a:xfrm>
-            <a:off x="566928" y="3214529"/>
-            <a:ext cx="11057839" cy="9525"/>
-          </a:xfrm>
-          <a:prstGeom prst="rect">
-            <a:avLst/>
-          </a:prstGeom>
-          <a:solidFill>
-            <a:srgbClr val="E5DCCE"/>
-          </a:solidFill>
-          <a:ln>
-            <a:noFill/>
-          </a:ln>
-          <a:effectLst/>
-        </p:spPr>
-        <p:style>
-          <a:lnRef idx="1">
-            <a:schemeClr val="accent1"/>
-          </a:lnRef>
-          <a:fillRef idx="3">
-            <a:schemeClr val="accent1"/>
-          </a:fillRef>
-          <a:effectRef idx="2">
-            <a:schemeClr val="accent1"/>
-          </a:effectRef>
-          <a:fontRef idx="minor">
-            <a:schemeClr val="lt1"/>
-          </a:fontRef>
-        </p:style>
-        <p:txBody>
-          <a:bodyPr rtlCol="0" anchor="ctr"/>
-          <a:lstStyle/>
-          <a:p>
             <a:pPr algn="ctr"/>
-          </a:p>
-        </p:txBody>
-      </p:sp>
-      <p:sp>
-        <p:nvSpPr>
-          <p:cNvPr id="6" name="TextBox 5"/>
-          <p:cNvSpPr txBox="1"/>
-          <p:nvPr/>
-        </p:nvSpPr>
-        <p:spPr>
-          <a:xfrm>
-            <a:off x="566928" y="3391821"/>
-            <a:ext cx="11057839" cy="254000"/>
-          </a:xfrm>
-          <a:prstGeom prst="rect">
-            <a:avLst/>
-          </a:prstGeom>
-          <a:noFill/>
-        </p:spPr>
-        <p:txBody>
-          <a:bodyPr wrap="none" lIns="0" rIns="0" tIns="0" bIns="0">
-            <a:noAutofit/>
-          </a:bodyPr>
-          <a:lstStyle/>
-          <a:p>
-            <a:r>
-              <a:rPr sz="1600" b="1">
-                <a:solidFill>
-                  <a:srgbClr val="5C7268"/>
-                </a:solidFill>
-                <a:latin typeface="Avenir Next"/>
-                <a:ea typeface="Hiragino Sans"/>
-                <a:cs typeface="Hiragino Sans"/>
-              </a:rPr>
-              <a:t>② 電圧降下｜ΔV = (R + jX)·I を実部と虚部に分ける</a:t>
-            </a:r>
-          </a:p>
-        </p:txBody>
-      </p:sp>
-      <p:sp>
-        <p:nvSpPr>
-          <p:cNvPr id="7" name="TextBox 6"/>
-          <p:cNvSpPr txBox="1"/>
-          <p:nvPr/>
-        </p:nvSpPr>
-        <p:spPr>
-          <a:xfrm>
-            <a:off x="822960" y="3683921"/>
-            <a:ext cx="10801807" cy="385762"/>
-          </a:xfrm>
-          <a:prstGeom prst="rect">
-            <a:avLst/>
-          </a:prstGeom>
-          <a:noFill/>
-        </p:spPr>
-        <p:txBody>
-          <a:bodyPr wrap="square" lIns="0" rIns="0" tIns="0" bIns="0">
-            <a:noAutofit/>
-          </a:bodyPr>
-          <a:lstStyle/>
-          <a:p>
-            <a:pPr>
-              <a:lnSpc>
-                <a:spcPct val="130000"/>
-              </a:lnSpc>
-            </a:pPr>
-            <a:r>
-              <a:rPr sz="1500">
-                <a:solidFill>
-                  <a:srgbClr val="33221E"/>
-                </a:solidFill>
-                <a:latin typeface="Avenir Next"/>
-                <a:ea typeface="Hiragino Sans"/>
-                <a:cs typeface="Hiragino Sans"/>
-              </a:rPr>
-              <a:t>ΔV = (RP + XQ)/V + j(XP − RQ)/V。位相差が小さければ </a:t>
-            </a:r>
-            <a:r>
-              <a:rPr sz="1500" b="1">
-                <a:solidFill>
-                  <a:srgbClr val="33221E"/>
-                </a:solidFill>
-                <a:latin typeface="Avenir Next"/>
-                <a:ea typeface="Hiragino Sans"/>
-                <a:cs typeface="Hiragino Sans"/>
-              </a:rPr>
-              <a:t>大きさの変化は実部だけ</a:t>
-            </a:r>
-            <a:r>
-              <a:rPr sz="1500">
-                <a:solidFill>
-                  <a:srgbClr val="33221E"/>
-                </a:solidFill>
-                <a:latin typeface="Avenir Next"/>
-                <a:ea typeface="Hiragino Sans"/>
-                <a:cs typeface="Hiragino Sans"/>
-              </a:rPr>
-              <a:t>で決まる。</a:t>
-            </a:r>
-          </a:p>
-        </p:txBody>
-      </p:sp>
-      <p:sp>
-        <p:nvSpPr>
-          <p:cNvPr id="8" name="Rectangle 7"/>
-          <p:cNvSpPr/>
-          <p:nvPr/>
-        </p:nvSpPr>
-        <p:spPr>
-          <a:xfrm>
-            <a:off x="566928" y="4221575"/>
-            <a:ext cx="11057839" cy="9525"/>
-          </a:xfrm>
-          <a:prstGeom prst="rect">
-            <a:avLst/>
-          </a:prstGeom>
-          <a:solidFill>
-            <a:srgbClr val="E5DCCE"/>
-          </a:solidFill>
-          <a:ln>
-            <a:noFill/>
-          </a:ln>
-          <a:effectLst/>
-        </p:spPr>
-        <p:style>
-          <a:lnRef idx="1">
-            <a:schemeClr val="accent1"/>
-          </a:lnRef>
-          <a:fillRef idx="3">
-            <a:schemeClr val="accent1"/>
-          </a:fillRef>
-          <a:effectRef idx="2">
-            <a:schemeClr val="accent1"/>
-          </a:effectRef>
-          <a:fontRef idx="minor">
-            <a:schemeClr val="lt1"/>
-          </a:fontRef>
-        </p:style>
-        <p:txBody>
-          <a:bodyPr rtlCol="0" anchor="ctr"/>
-          <a:lstStyle/>
-          <a:p>
-            <a:pPr algn="ctr"/>
-          </a:p>
-        </p:txBody>
-      </p:sp>
-      <p:sp>
-        <p:nvSpPr>
-          <p:cNvPr id="9" name="build:ghost"/>
-          <p:cNvSpPr txBox="1"/>
-          <p:nvPr/>
-        </p:nvSpPr>
-        <p:spPr>
-          <a:xfrm>
-            <a:off x="566928" y="4398867"/>
-            <a:ext cx="11057839" cy="254000"/>
-          </a:xfrm>
-          <a:prstGeom prst="rect">
-            <a:avLst/>
-          </a:prstGeom>
-          <a:noFill/>
-        </p:spPr>
-        <p:txBody>
-          <a:bodyPr wrap="none" lIns="0" rIns="0" tIns="0" bIns="0">
-            <a:noAutofit/>
-          </a:bodyPr>
-          <a:lstStyle/>
-          <a:p>
-            <a:r>
-              <a:rPr sz="1600" b="1">
-                <a:solidFill>
-                  <a:srgbClr val="C1C9C5"/>
-                </a:solidFill>
-                <a:latin typeface="Avenir Next"/>
-                <a:ea typeface="Hiragino Sans"/>
-                <a:cs typeface="Hiragino Sans"/>
-              </a:rPr>
-              <a:t>③ 実用形｜ΔV ≈ (RP + XQ)/V</a:t>
-            </a:r>
-          </a:p>
-        </p:txBody>
-      </p:sp>
-      <p:sp>
-        <p:nvSpPr>
-          <p:cNvPr id="10" name="build:ghost"/>
-          <p:cNvSpPr txBox="1"/>
-          <p:nvPr/>
-        </p:nvSpPr>
-        <p:spPr>
-          <a:xfrm>
-            <a:off x="822960" y="4690967"/>
-            <a:ext cx="10801807" cy="385762"/>
-          </a:xfrm>
-          <a:prstGeom prst="rect">
-            <a:avLst/>
-          </a:prstGeom>
-          <a:noFill/>
-        </p:spPr>
-        <p:txBody>
-          <a:bodyPr wrap="square" lIns="0" rIns="0" tIns="0" bIns="0">
-            <a:noAutofit/>
-          </a:bodyPr>
-          <a:lstStyle/>
-          <a:p>
-            <a:pPr>
-              <a:lnSpc>
-                <a:spcPct val="130000"/>
-              </a:lnSpc>
-            </a:pPr>
-            <a:r>
-              <a:rPr sz="1500">
-                <a:solidFill>
-                  <a:srgbClr val="C1BCBB"/>
-                </a:solidFill>
-                <a:latin typeface="Avenir Next"/>
-                <a:ea typeface="Hiragino Sans"/>
-                <a:cs typeface="Hiragino Sans"/>
-              </a:rPr>
-              <a:t>送電線は X ≫ R なので </a:t>
-            </a:r>
-            <a:r>
-              <a:rPr sz="1500" b="1">
-                <a:solidFill>
-                  <a:srgbClr val="C1BCBB"/>
-                </a:solidFill>
-                <a:latin typeface="Avenir Next"/>
-                <a:ea typeface="Hiragino Sans"/>
-                <a:cs typeface="Hiragino Sans"/>
-              </a:rPr>
-              <a:t>XQ が支配</a:t>
-            </a:r>
-            <a:r>
-              <a:rPr sz="1500">
-                <a:solidFill>
-                  <a:srgbClr val="C1BCBB"/>
-                </a:solidFill>
-                <a:latin typeface="Avenir Next"/>
-                <a:ea typeface="Hiragino Sans"/>
-                <a:cs typeface="Hiragino Sans"/>
-              </a:rPr>
-              <a:t>。配電線は R が大きく </a:t>
-            </a:r>
-            <a:r>
-              <a:rPr sz="1500" b="1">
-                <a:solidFill>
-                  <a:srgbClr val="C1BCBB"/>
-                </a:solidFill>
-                <a:latin typeface="Avenir Next"/>
-                <a:ea typeface="Hiragino Sans"/>
-                <a:cs typeface="Hiragino Sans"/>
-              </a:rPr>
-              <a:t>RP も効く</a:t>
-            </a:r>
-            <a:r>
-              <a:rPr sz="1500">
-                <a:solidFill>
-                  <a:srgbClr val="C1BCBB"/>
-                </a:solidFill>
-                <a:latin typeface="Avenir Next"/>
-                <a:ea typeface="Hiragino Sans"/>
-                <a:cs typeface="Hiragino Sans"/>
-              </a:rPr>
-              <a:t>。だから太陽光の逆潮流（P &lt; 0）で電圧が上がる。</a:t>
-            </a:r>
-          </a:p>
-        </p:txBody>
-      </p:sp>
-      <p:sp>
-        <p:nvSpPr>
-          <p:cNvPr id="11" name="TextBox 10"/>
+            <a:r>
+              <a:rPr sz="1400">
+                <a:solidFill>
+                  <a:srgbClr val="71635B"/>
+                </a:solidFill>
+                <a:latin typeface="Avenir Next"/>
+                <a:ea typeface="Hiragino Sans"/>
+                <a:cs typeface="Hiragino Sans"/>
+              </a:rPr>
+              <a:t>ΔV = (RP + XQ)/V + j(XP − RQ)/V。位相差が小さければ 大きさの変化は実部だけで決まる。　出典｜コード/fig_ch06.py</a:t>
+            </a:r>
+          </a:p>
+        </p:txBody>
+      </p:sp>
+      <p:sp>
+        <p:nvSpPr>
+          <p:cNvPr id="5" name="TextBox 4"/>
           <p:cNvSpPr txBox="1"/>
           <p:nvPr/>
         </p:nvSpPr>
@@ -9579,59 +8925,14 @@
       <p:grpSpPr/>
       <p:sp>
         <p:nvSpPr>
-          <p:cNvPr id="2" name="TextBox 1"/>
+          <p:cNvPr id="2" name="edge:title"/>
           <p:cNvSpPr txBox="1"/>
           <p:nvPr/>
         </p:nvSpPr>
         <p:spPr>
           <a:xfrm>
-            <a:off x="566928" y="457200"/>
-            <a:ext cx="11057839" cy="658368"/>
-          </a:xfrm>
-          <a:prstGeom prst="rect">
-            <a:avLst/>
-          </a:prstGeom>
-          <a:noFill/>
-        </p:spPr>
-        <p:txBody>
-          <a:bodyPr wrap="square" lIns="0" rIns="0" tIns="0" bIns="0" anchor="ctr">
-            <a:noAutofit/>
-          </a:bodyPr>
-          <a:lstStyle/>
-          <a:p>
-            <a:pPr>
-              <a:lnSpc>
-                <a:spcPct val="106000"/>
-              </a:lnSpc>
-              <a:defRPr sz="3390" b="1">
-                <a:solidFill>
-                  <a:srgbClr val="7C332A"/>
-                </a:solidFill>
-                <a:latin typeface="Avenir Next"/>
-                <a:ea typeface="Hiragino Sans"/>
-                <a:cs typeface="Hiragino Sans"/>
-              </a:defRPr>
-            </a:pPr>
-            <a:r>
-              <a:rPr>
-                <a:ea typeface="Hiragino Sans"/>
-                <a:cs typeface="Hiragino Sans"/>
-              </a:rPr>
-              <a:t>導出 — 電圧降下の近似式</a:t>
-            </a:r>
-          </a:p>
-        </p:txBody>
-      </p:sp>
-      <p:sp>
-        <p:nvSpPr>
-          <p:cNvPr id="3" name="TextBox 2"/>
-          <p:cNvSpPr txBox="1"/>
-          <p:nvPr/>
-        </p:nvSpPr>
-        <p:spPr>
-          <a:xfrm>
-            <a:off x="566928" y="2384775"/>
-            <a:ext cx="11057839" cy="254000"/>
+            <a:off x="566928" y="146304"/>
+            <a:ext cx="11057839" cy="457200"/>
           </a:xfrm>
           <a:prstGeom prst="rect">
             <a:avLst/>
@@ -9644,30 +8945,60 @@
           </a:bodyPr>
           <a:lstStyle/>
           <a:p>
-            <a:r>
-              <a:rPr sz="1600" b="1">
-                <a:solidFill>
-                  <a:srgbClr val="5C7268"/>
-                </a:solidFill>
-                <a:latin typeface="Avenir Next"/>
-                <a:ea typeface="Hiragino Sans"/>
-                <a:cs typeface="Hiragino Sans"/>
-              </a:rPr>
-              <a:t>① 線路を流れる電流｜受電端で P + jQ を消費する</a:t>
-            </a:r>
-          </a:p>
-        </p:txBody>
-      </p:sp>
-      <p:sp>
-        <p:nvSpPr>
-          <p:cNvPr id="4" name="TextBox 3"/>
+            <a:pPr>
+              <a:defRPr sz="2400" b="1">
+                <a:solidFill>
+                  <a:srgbClr val="7C332A"/>
+                </a:solidFill>
+                <a:latin typeface="Avenir Next"/>
+                <a:ea typeface="Hiragino Sans"/>
+                <a:cs typeface="Hiragino Sans"/>
+              </a:defRPr>
+            </a:pPr>
+            <a:r>
+              <a:rPr>
+                <a:ea typeface="Hiragino Sans"/>
+                <a:cs typeface="Hiragino Sans"/>
+              </a:rPr>
+              <a:t>導出 — 電圧降下の近似式</a:t>
+            </a:r>
+          </a:p>
+        </p:txBody>
+      </p:sp>
+      <p:pic>
+        <p:nvPicPr>
+          <p:cNvPr id="3" name="Picture 2" descr="ch06_deriv_dv_3.png"/>
+          <p:cNvPicPr>
+            <a:picLocks noChangeAspect="1"/>
+          </p:cNvPicPr>
+          <p:nvPr/>
+        </p:nvPicPr>
+        <p:blipFill>
+          <a:blip r:embed="rId2"/>
+          <a:stretch>
+            <a:fillRect/>
+          </a:stretch>
+        </p:blipFill>
+        <p:spPr>
+          <a:xfrm>
+            <a:off x="762110" y="713232"/>
+            <a:ext cx="10667474" cy="5322316"/>
+          </a:xfrm>
+          <a:prstGeom prst="rect">
+            <a:avLst/>
+          </a:prstGeom>
+        </p:spPr>
+      </p:pic>
+      <p:sp>
+        <p:nvSpPr>
+          <p:cNvPr id="4" name="edge:caption"/>
           <p:cNvSpPr txBox="1"/>
           <p:nvPr/>
         </p:nvSpPr>
         <p:spPr>
           <a:xfrm>
-            <a:off x="822960" y="2676875"/>
-            <a:ext cx="10801807" cy="385762"/>
+            <a:off x="228600" y="6090412"/>
+            <a:ext cx="11734495" cy="520700"/>
           </a:xfrm>
           <a:prstGeom prst="rect">
             <a:avLst/>
@@ -9680,336 +9011,24 @@
           </a:bodyPr>
           <a:lstStyle/>
           <a:p>
-            <a:pPr>
-              <a:lnSpc>
-                <a:spcPct val="130000"/>
-              </a:lnSpc>
-            </a:pPr>
-            <a:r>
-              <a:rPr sz="1500">
-                <a:solidFill>
-                  <a:srgbClr val="33221E"/>
-                </a:solidFill>
-                <a:latin typeface="Avenir Next"/>
-                <a:ea typeface="Hiragino Sans"/>
-                <a:cs typeface="Hiragino Sans"/>
-              </a:rPr>
-              <a:t>受電端電圧を V、消費を P + jQ とすると I = (P − jQ)/V*。線路は R + jX。</a:t>
-            </a:r>
-          </a:p>
-        </p:txBody>
-      </p:sp>
-      <p:sp>
-        <p:nvSpPr>
-          <p:cNvPr id="5" name="Rectangle 4"/>
-          <p:cNvSpPr/>
-          <p:nvPr/>
-        </p:nvSpPr>
-        <p:spPr>
-          <a:xfrm>
-            <a:off x="566928" y="3214529"/>
-            <a:ext cx="11057839" cy="9525"/>
-          </a:xfrm>
-          <a:prstGeom prst="rect">
-            <a:avLst/>
-          </a:prstGeom>
-          <a:solidFill>
-            <a:srgbClr val="E5DCCE"/>
-          </a:solidFill>
-          <a:ln>
-            <a:noFill/>
-          </a:ln>
-          <a:effectLst/>
-        </p:spPr>
-        <p:style>
-          <a:lnRef idx="1">
-            <a:schemeClr val="accent1"/>
-          </a:lnRef>
-          <a:fillRef idx="3">
-            <a:schemeClr val="accent1"/>
-          </a:fillRef>
-          <a:effectRef idx="2">
-            <a:schemeClr val="accent1"/>
-          </a:effectRef>
-          <a:fontRef idx="minor">
-            <a:schemeClr val="lt1"/>
-          </a:fontRef>
-        </p:style>
-        <p:txBody>
-          <a:bodyPr rtlCol="0" anchor="ctr"/>
-          <a:lstStyle/>
-          <a:p>
             <a:pPr algn="ctr"/>
-          </a:p>
-        </p:txBody>
-      </p:sp>
-      <p:sp>
-        <p:nvSpPr>
-          <p:cNvPr id="6" name="TextBox 5"/>
-          <p:cNvSpPr txBox="1"/>
-          <p:nvPr/>
-        </p:nvSpPr>
-        <p:spPr>
-          <a:xfrm>
-            <a:off x="566928" y="3391821"/>
-            <a:ext cx="11057839" cy="254000"/>
-          </a:xfrm>
-          <a:prstGeom prst="rect">
-            <a:avLst/>
-          </a:prstGeom>
-          <a:noFill/>
-        </p:spPr>
-        <p:txBody>
-          <a:bodyPr wrap="none" lIns="0" rIns="0" tIns="0" bIns="0">
-            <a:noAutofit/>
-          </a:bodyPr>
-          <a:lstStyle/>
-          <a:p>
-            <a:r>
-              <a:rPr sz="1600" b="1">
-                <a:solidFill>
-                  <a:srgbClr val="5C7268"/>
-                </a:solidFill>
-                <a:latin typeface="Avenir Next"/>
-                <a:ea typeface="Hiragino Sans"/>
-                <a:cs typeface="Hiragino Sans"/>
-              </a:rPr>
-              <a:t>② 電圧降下｜ΔV = (R + jX)·I を実部と虚部に分ける</a:t>
-            </a:r>
-          </a:p>
-        </p:txBody>
-      </p:sp>
-      <p:sp>
-        <p:nvSpPr>
-          <p:cNvPr id="7" name="TextBox 6"/>
-          <p:cNvSpPr txBox="1"/>
-          <p:nvPr/>
-        </p:nvSpPr>
-        <p:spPr>
-          <a:xfrm>
-            <a:off x="822960" y="3683921"/>
-            <a:ext cx="10801807" cy="385762"/>
-          </a:xfrm>
-          <a:prstGeom prst="rect">
-            <a:avLst/>
-          </a:prstGeom>
-          <a:noFill/>
-        </p:spPr>
-        <p:txBody>
-          <a:bodyPr wrap="square" lIns="0" rIns="0" tIns="0" bIns="0">
-            <a:noAutofit/>
-          </a:bodyPr>
-          <a:lstStyle/>
-          <a:p>
-            <a:pPr>
-              <a:lnSpc>
-                <a:spcPct val="130000"/>
-              </a:lnSpc>
-            </a:pPr>
-            <a:r>
-              <a:rPr sz="1500">
-                <a:solidFill>
-                  <a:srgbClr val="33221E"/>
-                </a:solidFill>
-                <a:latin typeface="Avenir Next"/>
-                <a:ea typeface="Hiragino Sans"/>
-                <a:cs typeface="Hiragino Sans"/>
-              </a:rPr>
-              <a:t>ΔV = (RP + XQ)/V + j(XP − RQ)/V。位相差が小さければ </a:t>
-            </a:r>
-            <a:r>
-              <a:rPr sz="1500" b="1">
-                <a:solidFill>
-                  <a:srgbClr val="33221E"/>
-                </a:solidFill>
-                <a:latin typeface="Avenir Next"/>
-                <a:ea typeface="Hiragino Sans"/>
-                <a:cs typeface="Hiragino Sans"/>
-              </a:rPr>
-              <a:t>大きさの変化は実部だけ</a:t>
-            </a:r>
-            <a:r>
-              <a:rPr sz="1500">
-                <a:solidFill>
-                  <a:srgbClr val="33221E"/>
-                </a:solidFill>
-                <a:latin typeface="Avenir Next"/>
-                <a:ea typeface="Hiragino Sans"/>
-                <a:cs typeface="Hiragino Sans"/>
-              </a:rPr>
-              <a:t>で決まる。</a:t>
-            </a:r>
-          </a:p>
-        </p:txBody>
-      </p:sp>
-      <p:sp>
-        <p:nvSpPr>
-          <p:cNvPr id="8" name="Rectangle 7"/>
-          <p:cNvSpPr/>
-          <p:nvPr/>
-        </p:nvSpPr>
-        <p:spPr>
-          <a:xfrm>
-            <a:off x="566928" y="4221575"/>
-            <a:ext cx="11057839" cy="9525"/>
-          </a:xfrm>
-          <a:prstGeom prst="rect">
-            <a:avLst/>
-          </a:prstGeom>
-          <a:solidFill>
-            <a:srgbClr val="E5DCCE"/>
-          </a:solidFill>
-          <a:ln>
-            <a:noFill/>
-          </a:ln>
-          <a:effectLst/>
-        </p:spPr>
-        <p:style>
-          <a:lnRef idx="1">
-            <a:schemeClr val="accent1"/>
-          </a:lnRef>
-          <a:fillRef idx="3">
-            <a:schemeClr val="accent1"/>
-          </a:fillRef>
-          <a:effectRef idx="2">
-            <a:schemeClr val="accent1"/>
-          </a:effectRef>
-          <a:fontRef idx="minor">
-            <a:schemeClr val="lt1"/>
-          </a:fontRef>
-        </p:style>
-        <p:txBody>
-          <a:bodyPr rtlCol="0" anchor="ctr"/>
-          <a:lstStyle/>
-          <a:p>
-            <a:pPr algn="ctr"/>
-          </a:p>
-        </p:txBody>
-      </p:sp>
-      <p:sp>
-        <p:nvSpPr>
-          <p:cNvPr id="9" name="TextBox 8"/>
-          <p:cNvSpPr txBox="1"/>
-          <p:nvPr/>
-        </p:nvSpPr>
-        <p:spPr>
-          <a:xfrm>
-            <a:off x="566928" y="4398867"/>
-            <a:ext cx="11057839" cy="254000"/>
-          </a:xfrm>
-          <a:prstGeom prst="rect">
-            <a:avLst/>
-          </a:prstGeom>
-          <a:noFill/>
-        </p:spPr>
-        <p:txBody>
-          <a:bodyPr wrap="none" lIns="0" rIns="0" tIns="0" bIns="0">
-            <a:noAutofit/>
-          </a:bodyPr>
-          <a:lstStyle/>
-          <a:p>
-            <a:r>
-              <a:rPr sz="1600" b="1">
-                <a:solidFill>
-                  <a:srgbClr val="5C7268"/>
-                </a:solidFill>
-                <a:latin typeface="Avenir Next"/>
-                <a:ea typeface="Hiragino Sans"/>
-                <a:cs typeface="Hiragino Sans"/>
-              </a:rPr>
-              <a:t>③ 実用形｜ΔV ≈ (RP + XQ)/V</a:t>
-            </a:r>
-          </a:p>
-        </p:txBody>
-      </p:sp>
-      <p:sp>
-        <p:nvSpPr>
-          <p:cNvPr id="10" name="TextBox 9"/>
-          <p:cNvSpPr txBox="1"/>
-          <p:nvPr/>
-        </p:nvSpPr>
-        <p:spPr>
-          <a:xfrm>
-            <a:off x="822960" y="4690967"/>
-            <a:ext cx="10801807" cy="385762"/>
-          </a:xfrm>
-          <a:prstGeom prst="rect">
-            <a:avLst/>
-          </a:prstGeom>
-          <a:noFill/>
-        </p:spPr>
-        <p:txBody>
-          <a:bodyPr wrap="square" lIns="0" rIns="0" tIns="0" bIns="0">
-            <a:noAutofit/>
-          </a:bodyPr>
-          <a:lstStyle/>
-          <a:p>
-            <a:pPr>
-              <a:lnSpc>
-                <a:spcPct val="130000"/>
-              </a:lnSpc>
-            </a:pPr>
-            <a:r>
-              <a:rPr sz="1500">
-                <a:solidFill>
-                  <a:srgbClr val="33221E"/>
-                </a:solidFill>
-                <a:latin typeface="Avenir Next"/>
-                <a:ea typeface="Hiragino Sans"/>
-                <a:cs typeface="Hiragino Sans"/>
-              </a:rPr>
-              <a:t>送電線は X ≫ R なので </a:t>
-            </a:r>
-            <a:r>
-              <a:rPr sz="1500" b="1">
-                <a:solidFill>
-                  <a:srgbClr val="33221E"/>
-                </a:solidFill>
-                <a:latin typeface="Avenir Next"/>
-                <a:ea typeface="Hiragino Sans"/>
-                <a:cs typeface="Hiragino Sans"/>
-              </a:rPr>
-              <a:t>XQ が支配</a:t>
-            </a:r>
-            <a:r>
-              <a:rPr sz="1500">
-                <a:solidFill>
-                  <a:srgbClr val="33221E"/>
-                </a:solidFill>
-                <a:latin typeface="Avenir Next"/>
-                <a:ea typeface="Hiragino Sans"/>
-                <a:cs typeface="Hiragino Sans"/>
-              </a:rPr>
-              <a:t>。配電線は R が大きく </a:t>
-            </a:r>
-            <a:r>
-              <a:rPr sz="1500" b="1">
-                <a:solidFill>
-                  <a:srgbClr val="33221E"/>
-                </a:solidFill>
-                <a:latin typeface="Avenir Next"/>
-                <a:ea typeface="Hiragino Sans"/>
-                <a:cs typeface="Hiragino Sans"/>
-              </a:rPr>
-              <a:t>RP も効く</a:t>
-            </a:r>
-            <a:r>
-              <a:rPr sz="1500">
-                <a:solidFill>
-                  <a:srgbClr val="33221E"/>
-                </a:solidFill>
-                <a:latin typeface="Avenir Next"/>
-                <a:ea typeface="Hiragino Sans"/>
-                <a:cs typeface="Hiragino Sans"/>
-              </a:rPr>
-              <a:t>。だから太陽光の逆潮流（P &lt; 0）で電圧が上がる。</a:t>
-            </a:r>
-          </a:p>
-        </p:txBody>
-      </p:sp>
-      <p:sp>
-        <p:nvSpPr>
-          <p:cNvPr id="11" name="TextBox 10"/>
+            <a:r>
+              <a:rPr sz="1400">
+                <a:solidFill>
+                  <a:srgbClr val="71635B"/>
+                </a:solidFill>
+                <a:latin typeface="Avenir Next"/>
+                <a:ea typeface="Hiragino Sans"/>
+                <a:cs typeface="Hiragino Sans"/>
+              </a:rPr>
+              <a:t>送電線は X ≫ R なので XQ が支配。配電線は R が大きく RP も効く。だから太陽光の逆潮流（P &lt; 0）で電圧が上がる。　出典｜コード/fig_ch06.py</a:t>
+            </a:r>
+          </a:p>
+        </p:txBody>
+      </p:sp>
+      <p:sp>
+        <p:nvSpPr>
+          <p:cNvPr id="5" name="TextBox 4"/>
           <p:cNvSpPr txBox="1"/>
           <p:nvPr/>
         </p:nvSpPr>
@@ -11660,59 +10679,14 @@
       <p:grpSpPr/>
       <p:sp>
         <p:nvSpPr>
-          <p:cNvPr id="2" name="TextBox 1"/>
+          <p:cNvPr id="2" name="edge:title"/>
           <p:cNvSpPr txBox="1"/>
           <p:nvPr/>
         </p:nvSpPr>
         <p:spPr>
           <a:xfrm>
-            <a:off x="566928" y="457200"/>
-            <a:ext cx="11057839" cy="658368"/>
-          </a:xfrm>
-          <a:prstGeom prst="rect">
-            <a:avLst/>
-          </a:prstGeom>
-          <a:noFill/>
-        </p:spPr>
-        <p:txBody>
-          <a:bodyPr wrap="square" lIns="0" rIns="0" tIns="0" bIns="0" anchor="ctr">
-            <a:noAutofit/>
-          </a:bodyPr>
-          <a:lstStyle/>
-          <a:p>
-            <a:pPr>
-              <a:lnSpc>
-                <a:spcPct val="106000"/>
-              </a:lnSpc>
-              <a:defRPr sz="3390" b="1">
-                <a:solidFill>
-                  <a:srgbClr val="7C332A"/>
-                </a:solidFill>
-                <a:latin typeface="Avenir Next"/>
-                <a:ea typeface="Hiragino Sans"/>
-                <a:cs typeface="Hiragino Sans"/>
-              </a:defRPr>
-            </a:pPr>
-            <a:r>
-              <a:rPr>
-                <a:ea typeface="Hiragino Sans"/>
-                <a:cs typeface="Hiragino Sans"/>
-              </a:rPr>
-              <a:t>導出 — PV カーブの鼻先</a:t>
-            </a:r>
-          </a:p>
-        </p:txBody>
-      </p:sp>
-      <p:sp>
-        <p:nvSpPr>
-          <p:cNvPr id="3" name="TextBox 2"/>
-          <p:cNvSpPr txBox="1"/>
-          <p:nvPr/>
-        </p:nvSpPr>
-        <p:spPr>
-          <a:xfrm>
-            <a:off x="566928" y="2384775"/>
-            <a:ext cx="11057839" cy="254000"/>
+            <a:off x="566928" y="146304"/>
+            <a:ext cx="11057839" cy="457200"/>
           </a:xfrm>
           <a:prstGeom prst="rect">
             <a:avLst/>
@@ -11725,30 +10699,60 @@
           </a:bodyPr>
           <a:lstStyle/>
           <a:p>
-            <a:r>
-              <a:rPr sz="1600" b="1">
-                <a:solidFill>
-                  <a:srgbClr val="5C7268"/>
-                </a:solidFill>
-                <a:latin typeface="Avenir Next"/>
-                <a:ea typeface="Hiragino Sans"/>
-                <a:cs typeface="Hiragino Sans"/>
-              </a:rPr>
-              <a:t>① 2 母線・R = 0・力率 1｜送電端 V_s、受電端 V_r、リアクタンス X</a:t>
-            </a:r>
-          </a:p>
-        </p:txBody>
-      </p:sp>
-      <p:sp>
-        <p:nvSpPr>
-          <p:cNvPr id="4" name="TextBox 3"/>
+            <a:pPr>
+              <a:defRPr sz="2400" b="1">
+                <a:solidFill>
+                  <a:srgbClr val="7C332A"/>
+                </a:solidFill>
+                <a:latin typeface="Avenir Next"/>
+                <a:ea typeface="Hiragino Sans"/>
+                <a:cs typeface="Hiragino Sans"/>
+              </a:defRPr>
+            </a:pPr>
+            <a:r>
+              <a:rPr>
+                <a:ea typeface="Hiragino Sans"/>
+                <a:cs typeface="Hiragino Sans"/>
+              </a:rPr>
+              <a:t>導出 — PV カーブの鼻先</a:t>
+            </a:r>
+          </a:p>
+        </p:txBody>
+      </p:sp>
+      <p:pic>
+        <p:nvPicPr>
+          <p:cNvPr id="3" name="Picture 2" descr="ch06_deriv_pvnose_1.png"/>
+          <p:cNvPicPr>
+            <a:picLocks noChangeAspect="1"/>
+          </p:cNvPicPr>
+          <p:nvPr/>
+        </p:nvPicPr>
+        <p:blipFill>
+          <a:blip r:embed="rId2"/>
+          <a:stretch>
+            <a:fillRect/>
+          </a:stretch>
+        </p:blipFill>
+        <p:spPr>
+          <a:xfrm>
+            <a:off x="551856" y="713232"/>
+            <a:ext cx="11087983" cy="5532120"/>
+          </a:xfrm>
+          <a:prstGeom prst="rect">
+            <a:avLst/>
+          </a:prstGeom>
+        </p:spPr>
+      </p:pic>
+      <p:sp>
+        <p:nvSpPr>
+          <p:cNvPr id="4" name="edge:caption"/>
           <p:cNvSpPr txBox="1"/>
           <p:nvPr/>
         </p:nvSpPr>
         <p:spPr>
           <a:xfrm>
-            <a:off x="822960" y="2676875"/>
-            <a:ext cx="10801807" cy="385762"/>
+            <a:off x="228600" y="6300216"/>
+            <a:ext cx="11734495" cy="310896"/>
           </a:xfrm>
           <a:prstGeom prst="rect">
             <a:avLst/>
@@ -11761,325 +10765,24 @@
           </a:bodyPr>
           <a:lstStyle/>
           <a:p>
-            <a:pPr>
-              <a:lnSpc>
-                <a:spcPct val="130000"/>
-              </a:lnSpc>
-            </a:pPr>
-            <a:r>
-              <a:rPr sz="1500">
-                <a:solidFill>
-                  <a:srgbClr val="33221E"/>
-                </a:solidFill>
-                <a:latin typeface="Avenir Next"/>
-                <a:ea typeface="Hiragino Sans"/>
-                <a:cs typeface="Hiragino Sans"/>
-              </a:rPr>
-              <a:t>P = V_sV_r sinδ / X、そして V_r の式を整理すると </a:t>
-            </a:r>
-            <a:r>
-              <a:rPr sz="1500" b="1">
-                <a:solidFill>
-                  <a:srgbClr val="33221E"/>
-                </a:solidFill>
-                <a:latin typeface="Avenir Next"/>
-                <a:ea typeface="Hiragino Sans"/>
-                <a:cs typeface="Hiragino Sans"/>
-              </a:rPr>
-              <a:t>V_r⁴ − V_s²V_r² + (XP)² = 0</a:t>
-            </a:r>
-            <a:r>
-              <a:rPr sz="1500">
-                <a:solidFill>
-                  <a:srgbClr val="33221E"/>
-                </a:solidFill>
-                <a:latin typeface="Avenir Next"/>
-                <a:ea typeface="Hiragino Sans"/>
-                <a:cs typeface="Hiragino Sans"/>
-              </a:rPr>
-              <a:t>。V_r² の 2 次方程式になる。</a:t>
-            </a:r>
-          </a:p>
-        </p:txBody>
-      </p:sp>
-      <p:sp>
-        <p:nvSpPr>
-          <p:cNvPr id="5" name="Rectangle 4"/>
-          <p:cNvSpPr/>
-          <p:nvPr/>
-        </p:nvSpPr>
-        <p:spPr>
-          <a:xfrm>
-            <a:off x="566928" y="3214529"/>
-            <a:ext cx="11057839" cy="9525"/>
-          </a:xfrm>
-          <a:prstGeom prst="rect">
-            <a:avLst/>
-          </a:prstGeom>
-          <a:solidFill>
-            <a:srgbClr val="E5DCCE"/>
-          </a:solidFill>
-          <a:ln>
-            <a:noFill/>
-          </a:ln>
-          <a:effectLst/>
-        </p:spPr>
-        <p:style>
-          <a:lnRef idx="1">
-            <a:schemeClr val="accent1"/>
-          </a:lnRef>
-          <a:fillRef idx="3">
-            <a:schemeClr val="accent1"/>
-          </a:fillRef>
-          <a:effectRef idx="2">
-            <a:schemeClr val="accent1"/>
-          </a:effectRef>
-          <a:fontRef idx="minor">
-            <a:schemeClr val="lt1"/>
-          </a:fontRef>
-        </p:style>
-        <p:txBody>
-          <a:bodyPr rtlCol="0" anchor="ctr"/>
-          <a:lstStyle/>
-          <a:p>
             <a:pPr algn="ctr"/>
-          </a:p>
-        </p:txBody>
-      </p:sp>
-      <p:sp>
-        <p:nvSpPr>
-          <p:cNvPr id="6" name="build:ghost"/>
-          <p:cNvSpPr txBox="1"/>
-          <p:nvPr/>
-        </p:nvSpPr>
-        <p:spPr>
-          <a:xfrm>
-            <a:off x="566928" y="3391821"/>
-            <a:ext cx="11057839" cy="254000"/>
-          </a:xfrm>
-          <a:prstGeom prst="rect">
-            <a:avLst/>
-          </a:prstGeom>
-          <a:noFill/>
-        </p:spPr>
-        <p:txBody>
-          <a:bodyPr wrap="none" lIns="0" rIns="0" tIns="0" bIns="0">
-            <a:noAutofit/>
-          </a:bodyPr>
-          <a:lstStyle/>
-          <a:p>
-            <a:r>
-              <a:rPr sz="1600" b="1">
-                <a:solidFill>
-                  <a:srgbClr val="C1C9C5"/>
-                </a:solidFill>
-                <a:latin typeface="Avenir Next"/>
-                <a:ea typeface="Hiragino Sans"/>
-                <a:cs typeface="Hiragino Sans"/>
-              </a:rPr>
-              <a:t>② 解が 2 つ｜判別式 V_s⁴ − 4(XP)² ≥ 0</a:t>
-            </a:r>
-          </a:p>
-        </p:txBody>
-      </p:sp>
-      <p:sp>
-        <p:nvSpPr>
-          <p:cNvPr id="7" name="build:ghost"/>
-          <p:cNvSpPr txBox="1"/>
-          <p:nvPr/>
-        </p:nvSpPr>
-        <p:spPr>
-          <a:xfrm>
-            <a:off x="822960" y="3683921"/>
-            <a:ext cx="10801807" cy="385762"/>
-          </a:xfrm>
-          <a:prstGeom prst="rect">
-            <a:avLst/>
-          </a:prstGeom>
-          <a:noFill/>
-        </p:spPr>
-        <p:txBody>
-          <a:bodyPr wrap="square" lIns="0" rIns="0" tIns="0" bIns="0">
-            <a:noAutofit/>
-          </a:bodyPr>
-          <a:lstStyle/>
-          <a:p>
-            <a:pPr>
-              <a:lnSpc>
-                <a:spcPct val="130000"/>
-              </a:lnSpc>
-            </a:pPr>
-            <a:r>
-              <a:rPr sz="1500">
-                <a:solidFill>
-                  <a:srgbClr val="C1BCBB"/>
-                </a:solidFill>
-                <a:latin typeface="Avenir Next"/>
-                <a:ea typeface="Hiragino Sans"/>
-                <a:cs typeface="Hiragino Sans"/>
-              </a:rPr>
-              <a:t>上枝（運用点）と下枝（不安定）。同じ P に対して電圧が 2 通りある。</a:t>
-            </a:r>
-          </a:p>
-        </p:txBody>
-      </p:sp>
-      <p:sp>
-        <p:nvSpPr>
-          <p:cNvPr id="8" name="Rectangle 7"/>
-          <p:cNvSpPr/>
-          <p:nvPr/>
-        </p:nvSpPr>
-        <p:spPr>
-          <a:xfrm>
-            <a:off x="566928" y="4221575"/>
-            <a:ext cx="11057839" cy="9525"/>
-          </a:xfrm>
-          <a:prstGeom prst="rect">
-            <a:avLst/>
-          </a:prstGeom>
-          <a:solidFill>
-            <a:srgbClr val="E5DCCE"/>
-          </a:solidFill>
-          <a:ln>
-            <a:noFill/>
-          </a:ln>
-          <a:effectLst/>
-        </p:spPr>
-        <p:style>
-          <a:lnRef idx="1">
-            <a:schemeClr val="accent1"/>
-          </a:lnRef>
-          <a:fillRef idx="3">
-            <a:schemeClr val="accent1"/>
-          </a:fillRef>
-          <a:effectRef idx="2">
-            <a:schemeClr val="accent1"/>
-          </a:effectRef>
-          <a:fontRef idx="minor">
-            <a:schemeClr val="lt1"/>
-          </a:fontRef>
-        </p:style>
-        <p:txBody>
-          <a:bodyPr rtlCol="0" anchor="ctr"/>
-          <a:lstStyle/>
-          <a:p>
-            <a:pPr algn="ctr"/>
-          </a:p>
-        </p:txBody>
-      </p:sp>
-      <p:sp>
-        <p:nvSpPr>
-          <p:cNvPr id="9" name="build:ghost"/>
-          <p:cNvSpPr txBox="1"/>
-          <p:nvPr/>
-        </p:nvSpPr>
-        <p:spPr>
-          <a:xfrm>
-            <a:off x="566928" y="4398867"/>
-            <a:ext cx="11057839" cy="254000"/>
-          </a:xfrm>
-          <a:prstGeom prst="rect">
-            <a:avLst/>
-          </a:prstGeom>
-          <a:noFill/>
-        </p:spPr>
-        <p:txBody>
-          <a:bodyPr wrap="none" lIns="0" rIns="0" tIns="0" bIns="0">
-            <a:noAutofit/>
-          </a:bodyPr>
-          <a:lstStyle/>
-          <a:p>
-            <a:r>
-              <a:rPr sz="1600" b="1">
-                <a:solidFill>
-                  <a:srgbClr val="C1C9C5"/>
-                </a:solidFill>
-                <a:latin typeface="Avenir Next"/>
-                <a:ea typeface="Hiragino Sans"/>
-                <a:cs typeface="Hiragino Sans"/>
-              </a:rPr>
-              <a:t>③ 鼻先｜判別式が 0 になる点</a:t>
-            </a:r>
-          </a:p>
-        </p:txBody>
-      </p:sp>
-      <p:sp>
-        <p:nvSpPr>
-          <p:cNvPr id="10" name="build:ghost"/>
-          <p:cNvSpPr txBox="1"/>
-          <p:nvPr/>
-        </p:nvSpPr>
-        <p:spPr>
-          <a:xfrm>
-            <a:off x="822960" y="4690967"/>
-            <a:ext cx="10801807" cy="385762"/>
-          </a:xfrm>
-          <a:prstGeom prst="rect">
-            <a:avLst/>
-          </a:prstGeom>
-          <a:noFill/>
-        </p:spPr>
-        <p:txBody>
-          <a:bodyPr wrap="square" lIns="0" rIns="0" tIns="0" bIns="0">
-            <a:noAutofit/>
-          </a:bodyPr>
-          <a:lstStyle/>
-          <a:p>
-            <a:pPr>
-              <a:lnSpc>
-                <a:spcPct val="130000"/>
-              </a:lnSpc>
-            </a:pPr>
-            <a:r>
-              <a:rPr sz="1500" b="1">
-                <a:solidFill>
-                  <a:srgbClr val="C1BCBB"/>
-                </a:solidFill>
-                <a:latin typeface="Avenir Next"/>
-                <a:ea typeface="Hiragino Sans"/>
-                <a:cs typeface="Hiragino Sans"/>
-              </a:rPr>
-              <a:t>P_max = V_s²/(2X)</a:t>
-            </a:r>
-            <a:r>
-              <a:rPr sz="1500">
-                <a:solidFill>
-                  <a:srgbClr val="C1BCBB"/>
-                </a:solidFill>
-                <a:latin typeface="Avenir Next"/>
-                <a:ea typeface="Hiragino Sans"/>
-                <a:cs typeface="Hiragino Sans"/>
-              </a:rPr>
-              <a:t>、そのとき </a:t>
-            </a:r>
-            <a:r>
-              <a:rPr sz="1500" b="1">
-                <a:solidFill>
-                  <a:srgbClr val="C1BCBB"/>
-                </a:solidFill>
-                <a:latin typeface="Avenir Next"/>
-                <a:ea typeface="Hiragino Sans"/>
-                <a:cs typeface="Hiragino Sans"/>
-              </a:rPr>
-              <a:t>V_r = V_s/√2 = 0.707 V_s</a:t>
-            </a:r>
-            <a:r>
-              <a:rPr sz="1500">
-                <a:solidFill>
-                  <a:srgbClr val="C1BCBB"/>
-                </a:solidFill>
-                <a:latin typeface="Avenir Next"/>
-                <a:ea typeface="Hiragino Sans"/>
-                <a:cs typeface="Hiragino Sans"/>
-              </a:rPr>
-              <a:t>。これを超えると解が存在しない。</a:t>
-            </a:r>
-          </a:p>
-        </p:txBody>
-      </p:sp>
-      <p:sp>
-        <p:nvSpPr>
-          <p:cNvPr id="11" name="TextBox 10"/>
+            <a:r>
+              <a:rPr sz="1400">
+                <a:solidFill>
+                  <a:srgbClr val="71635B"/>
+                </a:solidFill>
+                <a:latin typeface="Avenir Next"/>
+                <a:ea typeface="Hiragino Sans"/>
+                <a:cs typeface="Hiragino Sans"/>
+              </a:rPr>
+              <a:t>P = V_sV_r sinδ / X、そして V_r の式を整理すると V_r⁴ − V_s²V_r² + (XP)² = 0。V_r² の 2 次方程式になる。　出典｜コード/fig_ch06.py</a:t>
+            </a:r>
+          </a:p>
+        </p:txBody>
+      </p:sp>
+      <p:sp>
+        <p:nvSpPr>
+          <p:cNvPr id="5" name="TextBox 4"/>
           <p:cNvSpPr txBox="1"/>
           <p:nvPr/>
         </p:nvSpPr>
@@ -12135,59 +10838,14 @@
       <p:grpSpPr/>
       <p:sp>
         <p:nvSpPr>
-          <p:cNvPr id="2" name="TextBox 1"/>
+          <p:cNvPr id="2" name="edge:title"/>
           <p:cNvSpPr txBox="1"/>
           <p:nvPr/>
         </p:nvSpPr>
         <p:spPr>
           <a:xfrm>
-            <a:off x="566928" y="457200"/>
-            <a:ext cx="11057839" cy="658368"/>
-          </a:xfrm>
-          <a:prstGeom prst="rect">
-            <a:avLst/>
-          </a:prstGeom>
-          <a:noFill/>
-        </p:spPr>
-        <p:txBody>
-          <a:bodyPr wrap="square" lIns="0" rIns="0" tIns="0" bIns="0" anchor="ctr">
-            <a:noAutofit/>
-          </a:bodyPr>
-          <a:lstStyle/>
-          <a:p>
-            <a:pPr>
-              <a:lnSpc>
-                <a:spcPct val="106000"/>
-              </a:lnSpc>
-              <a:defRPr sz="3390" b="1">
-                <a:solidFill>
-                  <a:srgbClr val="7C332A"/>
-                </a:solidFill>
-                <a:latin typeface="Avenir Next"/>
-                <a:ea typeface="Hiragino Sans"/>
-                <a:cs typeface="Hiragino Sans"/>
-              </a:defRPr>
-            </a:pPr>
-            <a:r>
-              <a:rPr>
-                <a:ea typeface="Hiragino Sans"/>
-                <a:cs typeface="Hiragino Sans"/>
-              </a:rPr>
-              <a:t>導出 — PV カーブの鼻先</a:t>
-            </a:r>
-          </a:p>
-        </p:txBody>
-      </p:sp>
-      <p:sp>
-        <p:nvSpPr>
-          <p:cNvPr id="3" name="TextBox 2"/>
-          <p:cNvSpPr txBox="1"/>
-          <p:nvPr/>
-        </p:nvSpPr>
-        <p:spPr>
-          <a:xfrm>
-            <a:off x="566928" y="2384775"/>
-            <a:ext cx="11057839" cy="254000"/>
+            <a:off x="566928" y="146304"/>
+            <a:ext cx="11057839" cy="457200"/>
           </a:xfrm>
           <a:prstGeom prst="rect">
             <a:avLst/>
@@ -12200,30 +10858,60 @@
           </a:bodyPr>
           <a:lstStyle/>
           <a:p>
-            <a:r>
-              <a:rPr sz="1600" b="1">
-                <a:solidFill>
-                  <a:srgbClr val="5C7268"/>
-                </a:solidFill>
-                <a:latin typeface="Avenir Next"/>
-                <a:ea typeface="Hiragino Sans"/>
-                <a:cs typeface="Hiragino Sans"/>
-              </a:rPr>
-              <a:t>① 2 母線・R = 0・力率 1｜送電端 V_s、受電端 V_r、リアクタンス X</a:t>
-            </a:r>
-          </a:p>
-        </p:txBody>
-      </p:sp>
-      <p:sp>
-        <p:nvSpPr>
-          <p:cNvPr id="4" name="TextBox 3"/>
+            <a:pPr>
+              <a:defRPr sz="2400" b="1">
+                <a:solidFill>
+                  <a:srgbClr val="7C332A"/>
+                </a:solidFill>
+                <a:latin typeface="Avenir Next"/>
+                <a:ea typeface="Hiragino Sans"/>
+                <a:cs typeface="Hiragino Sans"/>
+              </a:defRPr>
+            </a:pPr>
+            <a:r>
+              <a:rPr>
+                <a:ea typeface="Hiragino Sans"/>
+                <a:cs typeface="Hiragino Sans"/>
+              </a:rPr>
+              <a:t>導出 — PV カーブの鼻先</a:t>
+            </a:r>
+          </a:p>
+        </p:txBody>
+      </p:sp>
+      <p:pic>
+        <p:nvPicPr>
+          <p:cNvPr id="3" name="Picture 2" descr="ch06_deriv_pvnose_2.png"/>
+          <p:cNvPicPr>
+            <a:picLocks noChangeAspect="1"/>
+          </p:cNvPicPr>
+          <p:nvPr/>
+        </p:nvPicPr>
+        <p:blipFill>
+          <a:blip r:embed="rId2"/>
+          <a:stretch>
+            <a:fillRect/>
+          </a:stretch>
+        </p:blipFill>
+        <p:spPr>
+          <a:xfrm>
+            <a:off x="551856" y="713232"/>
+            <a:ext cx="11087983" cy="5532120"/>
+          </a:xfrm>
+          <a:prstGeom prst="rect">
+            <a:avLst/>
+          </a:prstGeom>
+        </p:spPr>
+      </p:pic>
+      <p:sp>
+        <p:nvSpPr>
+          <p:cNvPr id="4" name="edge:caption"/>
           <p:cNvSpPr txBox="1"/>
           <p:nvPr/>
         </p:nvSpPr>
         <p:spPr>
           <a:xfrm>
-            <a:off x="822960" y="2676875"/>
-            <a:ext cx="10801807" cy="385762"/>
+            <a:off x="228600" y="6300216"/>
+            <a:ext cx="11734495" cy="310896"/>
           </a:xfrm>
           <a:prstGeom prst="rect">
             <a:avLst/>
@@ -12236,325 +10924,24 @@
           </a:bodyPr>
           <a:lstStyle/>
           <a:p>
-            <a:pPr>
-              <a:lnSpc>
-                <a:spcPct val="130000"/>
-              </a:lnSpc>
-            </a:pPr>
-            <a:r>
-              <a:rPr sz="1500">
-                <a:solidFill>
-                  <a:srgbClr val="33221E"/>
-                </a:solidFill>
-                <a:latin typeface="Avenir Next"/>
-                <a:ea typeface="Hiragino Sans"/>
-                <a:cs typeface="Hiragino Sans"/>
-              </a:rPr>
-              <a:t>P = V_sV_r sinδ / X、そして V_r の式を整理すると </a:t>
-            </a:r>
-            <a:r>
-              <a:rPr sz="1500" b="1">
-                <a:solidFill>
-                  <a:srgbClr val="33221E"/>
-                </a:solidFill>
-                <a:latin typeface="Avenir Next"/>
-                <a:ea typeface="Hiragino Sans"/>
-                <a:cs typeface="Hiragino Sans"/>
-              </a:rPr>
-              <a:t>V_r⁴ − V_s²V_r² + (XP)² = 0</a:t>
-            </a:r>
-            <a:r>
-              <a:rPr sz="1500">
-                <a:solidFill>
-                  <a:srgbClr val="33221E"/>
-                </a:solidFill>
-                <a:latin typeface="Avenir Next"/>
-                <a:ea typeface="Hiragino Sans"/>
-                <a:cs typeface="Hiragino Sans"/>
-              </a:rPr>
-              <a:t>。V_r² の 2 次方程式になる。</a:t>
-            </a:r>
-          </a:p>
-        </p:txBody>
-      </p:sp>
-      <p:sp>
-        <p:nvSpPr>
-          <p:cNvPr id="5" name="Rectangle 4"/>
-          <p:cNvSpPr/>
-          <p:nvPr/>
-        </p:nvSpPr>
-        <p:spPr>
-          <a:xfrm>
-            <a:off x="566928" y="3214529"/>
-            <a:ext cx="11057839" cy="9525"/>
-          </a:xfrm>
-          <a:prstGeom prst="rect">
-            <a:avLst/>
-          </a:prstGeom>
-          <a:solidFill>
-            <a:srgbClr val="E5DCCE"/>
-          </a:solidFill>
-          <a:ln>
-            <a:noFill/>
-          </a:ln>
-          <a:effectLst/>
-        </p:spPr>
-        <p:style>
-          <a:lnRef idx="1">
-            <a:schemeClr val="accent1"/>
-          </a:lnRef>
-          <a:fillRef idx="3">
-            <a:schemeClr val="accent1"/>
-          </a:fillRef>
-          <a:effectRef idx="2">
-            <a:schemeClr val="accent1"/>
-          </a:effectRef>
-          <a:fontRef idx="minor">
-            <a:schemeClr val="lt1"/>
-          </a:fontRef>
-        </p:style>
-        <p:txBody>
-          <a:bodyPr rtlCol="0" anchor="ctr"/>
-          <a:lstStyle/>
-          <a:p>
             <a:pPr algn="ctr"/>
-          </a:p>
-        </p:txBody>
-      </p:sp>
-      <p:sp>
-        <p:nvSpPr>
-          <p:cNvPr id="6" name="TextBox 5"/>
-          <p:cNvSpPr txBox="1"/>
-          <p:nvPr/>
-        </p:nvSpPr>
-        <p:spPr>
-          <a:xfrm>
-            <a:off x="566928" y="3391821"/>
-            <a:ext cx="11057839" cy="254000"/>
-          </a:xfrm>
-          <a:prstGeom prst="rect">
-            <a:avLst/>
-          </a:prstGeom>
-          <a:noFill/>
-        </p:spPr>
-        <p:txBody>
-          <a:bodyPr wrap="none" lIns="0" rIns="0" tIns="0" bIns="0">
-            <a:noAutofit/>
-          </a:bodyPr>
-          <a:lstStyle/>
-          <a:p>
-            <a:r>
-              <a:rPr sz="1600" b="1">
-                <a:solidFill>
-                  <a:srgbClr val="5C7268"/>
-                </a:solidFill>
-                <a:latin typeface="Avenir Next"/>
-                <a:ea typeface="Hiragino Sans"/>
-                <a:cs typeface="Hiragino Sans"/>
-              </a:rPr>
-              <a:t>② 解が 2 つ｜判別式 V_s⁴ − 4(XP)² ≥ 0</a:t>
-            </a:r>
-          </a:p>
-        </p:txBody>
-      </p:sp>
-      <p:sp>
-        <p:nvSpPr>
-          <p:cNvPr id="7" name="TextBox 6"/>
-          <p:cNvSpPr txBox="1"/>
-          <p:nvPr/>
-        </p:nvSpPr>
-        <p:spPr>
-          <a:xfrm>
-            <a:off x="822960" y="3683921"/>
-            <a:ext cx="10801807" cy="385762"/>
-          </a:xfrm>
-          <a:prstGeom prst="rect">
-            <a:avLst/>
-          </a:prstGeom>
-          <a:noFill/>
-        </p:spPr>
-        <p:txBody>
-          <a:bodyPr wrap="square" lIns="0" rIns="0" tIns="0" bIns="0">
-            <a:noAutofit/>
-          </a:bodyPr>
-          <a:lstStyle/>
-          <a:p>
-            <a:pPr>
-              <a:lnSpc>
-                <a:spcPct val="130000"/>
-              </a:lnSpc>
-            </a:pPr>
-            <a:r>
-              <a:rPr sz="1500">
-                <a:solidFill>
-                  <a:srgbClr val="33221E"/>
-                </a:solidFill>
-                <a:latin typeface="Avenir Next"/>
-                <a:ea typeface="Hiragino Sans"/>
-                <a:cs typeface="Hiragino Sans"/>
-              </a:rPr>
-              <a:t>上枝（運用点）と下枝（不安定）。同じ P に対して電圧が 2 通りある。</a:t>
-            </a:r>
-          </a:p>
-        </p:txBody>
-      </p:sp>
-      <p:sp>
-        <p:nvSpPr>
-          <p:cNvPr id="8" name="Rectangle 7"/>
-          <p:cNvSpPr/>
-          <p:nvPr/>
-        </p:nvSpPr>
-        <p:spPr>
-          <a:xfrm>
-            <a:off x="566928" y="4221575"/>
-            <a:ext cx="11057839" cy="9525"/>
-          </a:xfrm>
-          <a:prstGeom prst="rect">
-            <a:avLst/>
-          </a:prstGeom>
-          <a:solidFill>
-            <a:srgbClr val="E5DCCE"/>
-          </a:solidFill>
-          <a:ln>
-            <a:noFill/>
-          </a:ln>
-          <a:effectLst/>
-        </p:spPr>
-        <p:style>
-          <a:lnRef idx="1">
-            <a:schemeClr val="accent1"/>
-          </a:lnRef>
-          <a:fillRef idx="3">
-            <a:schemeClr val="accent1"/>
-          </a:fillRef>
-          <a:effectRef idx="2">
-            <a:schemeClr val="accent1"/>
-          </a:effectRef>
-          <a:fontRef idx="minor">
-            <a:schemeClr val="lt1"/>
-          </a:fontRef>
-        </p:style>
-        <p:txBody>
-          <a:bodyPr rtlCol="0" anchor="ctr"/>
-          <a:lstStyle/>
-          <a:p>
-            <a:pPr algn="ctr"/>
-          </a:p>
-        </p:txBody>
-      </p:sp>
-      <p:sp>
-        <p:nvSpPr>
-          <p:cNvPr id="9" name="build:ghost"/>
-          <p:cNvSpPr txBox="1"/>
-          <p:nvPr/>
-        </p:nvSpPr>
-        <p:spPr>
-          <a:xfrm>
-            <a:off x="566928" y="4398867"/>
-            <a:ext cx="11057839" cy="254000"/>
-          </a:xfrm>
-          <a:prstGeom prst="rect">
-            <a:avLst/>
-          </a:prstGeom>
-          <a:noFill/>
-        </p:spPr>
-        <p:txBody>
-          <a:bodyPr wrap="none" lIns="0" rIns="0" tIns="0" bIns="0">
-            <a:noAutofit/>
-          </a:bodyPr>
-          <a:lstStyle/>
-          <a:p>
-            <a:r>
-              <a:rPr sz="1600" b="1">
-                <a:solidFill>
-                  <a:srgbClr val="C1C9C5"/>
-                </a:solidFill>
-                <a:latin typeface="Avenir Next"/>
-                <a:ea typeface="Hiragino Sans"/>
-                <a:cs typeface="Hiragino Sans"/>
-              </a:rPr>
-              <a:t>③ 鼻先｜判別式が 0 になる点</a:t>
-            </a:r>
-          </a:p>
-        </p:txBody>
-      </p:sp>
-      <p:sp>
-        <p:nvSpPr>
-          <p:cNvPr id="10" name="build:ghost"/>
-          <p:cNvSpPr txBox="1"/>
-          <p:nvPr/>
-        </p:nvSpPr>
-        <p:spPr>
-          <a:xfrm>
-            <a:off x="822960" y="4690967"/>
-            <a:ext cx="10801807" cy="385762"/>
-          </a:xfrm>
-          <a:prstGeom prst="rect">
-            <a:avLst/>
-          </a:prstGeom>
-          <a:noFill/>
-        </p:spPr>
-        <p:txBody>
-          <a:bodyPr wrap="square" lIns="0" rIns="0" tIns="0" bIns="0">
-            <a:noAutofit/>
-          </a:bodyPr>
-          <a:lstStyle/>
-          <a:p>
-            <a:pPr>
-              <a:lnSpc>
-                <a:spcPct val="130000"/>
-              </a:lnSpc>
-            </a:pPr>
-            <a:r>
-              <a:rPr sz="1500" b="1">
-                <a:solidFill>
-                  <a:srgbClr val="C1BCBB"/>
-                </a:solidFill>
-                <a:latin typeface="Avenir Next"/>
-                <a:ea typeface="Hiragino Sans"/>
-                <a:cs typeface="Hiragino Sans"/>
-              </a:rPr>
-              <a:t>P_max = V_s²/(2X)</a:t>
-            </a:r>
-            <a:r>
-              <a:rPr sz="1500">
-                <a:solidFill>
-                  <a:srgbClr val="C1BCBB"/>
-                </a:solidFill>
-                <a:latin typeface="Avenir Next"/>
-                <a:ea typeface="Hiragino Sans"/>
-                <a:cs typeface="Hiragino Sans"/>
-              </a:rPr>
-              <a:t>、そのとき </a:t>
-            </a:r>
-            <a:r>
-              <a:rPr sz="1500" b="1">
-                <a:solidFill>
-                  <a:srgbClr val="C1BCBB"/>
-                </a:solidFill>
-                <a:latin typeface="Avenir Next"/>
-                <a:ea typeface="Hiragino Sans"/>
-                <a:cs typeface="Hiragino Sans"/>
-              </a:rPr>
-              <a:t>V_r = V_s/√2 = 0.707 V_s</a:t>
-            </a:r>
-            <a:r>
-              <a:rPr sz="1500">
-                <a:solidFill>
-                  <a:srgbClr val="C1BCBB"/>
-                </a:solidFill>
-                <a:latin typeface="Avenir Next"/>
-                <a:ea typeface="Hiragino Sans"/>
-                <a:cs typeface="Hiragino Sans"/>
-              </a:rPr>
-              <a:t>。これを超えると解が存在しない。</a:t>
-            </a:r>
-          </a:p>
-        </p:txBody>
-      </p:sp>
-      <p:sp>
-        <p:nvSpPr>
-          <p:cNvPr id="11" name="TextBox 10"/>
+            <a:r>
+              <a:rPr sz="1400">
+                <a:solidFill>
+                  <a:srgbClr val="71635B"/>
+                </a:solidFill>
+                <a:latin typeface="Avenir Next"/>
+                <a:ea typeface="Hiragino Sans"/>
+                <a:cs typeface="Hiragino Sans"/>
+              </a:rPr>
+              <a:t>上枝（運用点）と下枝（不安定）。同じ P に対して電圧が 2 通りある。　出典｜コード/fig_ch06.py</a:t>
+            </a:r>
+          </a:p>
+        </p:txBody>
+      </p:sp>
+      <p:sp>
+        <p:nvSpPr>
+          <p:cNvPr id="5" name="TextBox 4"/>
           <p:cNvSpPr txBox="1"/>
           <p:nvPr/>
         </p:nvSpPr>
@@ -12610,59 +10997,14 @@
       <p:grpSpPr/>
       <p:sp>
         <p:nvSpPr>
-          <p:cNvPr id="2" name="TextBox 1"/>
+          <p:cNvPr id="2" name="edge:title"/>
           <p:cNvSpPr txBox="1"/>
           <p:nvPr/>
         </p:nvSpPr>
         <p:spPr>
           <a:xfrm>
-            <a:off x="566928" y="457200"/>
-            <a:ext cx="11057839" cy="658368"/>
-          </a:xfrm>
-          <a:prstGeom prst="rect">
-            <a:avLst/>
-          </a:prstGeom>
-          <a:noFill/>
-        </p:spPr>
-        <p:txBody>
-          <a:bodyPr wrap="square" lIns="0" rIns="0" tIns="0" bIns="0" anchor="ctr">
-            <a:noAutofit/>
-          </a:bodyPr>
-          <a:lstStyle/>
-          <a:p>
-            <a:pPr>
-              <a:lnSpc>
-                <a:spcPct val="106000"/>
-              </a:lnSpc>
-              <a:defRPr sz="3390" b="1">
-                <a:solidFill>
-                  <a:srgbClr val="7C332A"/>
-                </a:solidFill>
-                <a:latin typeface="Avenir Next"/>
-                <a:ea typeface="Hiragino Sans"/>
-                <a:cs typeface="Hiragino Sans"/>
-              </a:defRPr>
-            </a:pPr>
-            <a:r>
-              <a:rPr>
-                <a:ea typeface="Hiragino Sans"/>
-                <a:cs typeface="Hiragino Sans"/>
-              </a:rPr>
-              <a:t>導出 — PV カーブの鼻先</a:t>
-            </a:r>
-          </a:p>
-        </p:txBody>
-      </p:sp>
-      <p:sp>
-        <p:nvSpPr>
-          <p:cNvPr id="3" name="TextBox 2"/>
-          <p:cNvSpPr txBox="1"/>
-          <p:nvPr/>
-        </p:nvSpPr>
-        <p:spPr>
-          <a:xfrm>
-            <a:off x="566928" y="2384775"/>
-            <a:ext cx="11057839" cy="254000"/>
+            <a:off x="566928" y="146304"/>
+            <a:ext cx="11057839" cy="457200"/>
           </a:xfrm>
           <a:prstGeom prst="rect">
             <a:avLst/>
@@ -12675,30 +11017,60 @@
           </a:bodyPr>
           <a:lstStyle/>
           <a:p>
-            <a:r>
-              <a:rPr sz="1600" b="1">
-                <a:solidFill>
-                  <a:srgbClr val="5C7268"/>
-                </a:solidFill>
-                <a:latin typeface="Avenir Next"/>
-                <a:ea typeface="Hiragino Sans"/>
-                <a:cs typeface="Hiragino Sans"/>
-              </a:rPr>
-              <a:t>① 2 母線・R = 0・力率 1｜送電端 V_s、受電端 V_r、リアクタンス X</a:t>
-            </a:r>
-          </a:p>
-        </p:txBody>
-      </p:sp>
-      <p:sp>
-        <p:nvSpPr>
-          <p:cNvPr id="4" name="TextBox 3"/>
+            <a:pPr>
+              <a:defRPr sz="2400" b="1">
+                <a:solidFill>
+                  <a:srgbClr val="7C332A"/>
+                </a:solidFill>
+                <a:latin typeface="Avenir Next"/>
+                <a:ea typeface="Hiragino Sans"/>
+                <a:cs typeface="Hiragino Sans"/>
+              </a:defRPr>
+            </a:pPr>
+            <a:r>
+              <a:rPr>
+                <a:ea typeface="Hiragino Sans"/>
+                <a:cs typeface="Hiragino Sans"/>
+              </a:rPr>
+              <a:t>導出 — PV カーブの鼻先</a:t>
+            </a:r>
+          </a:p>
+        </p:txBody>
+      </p:sp>
+      <p:pic>
+        <p:nvPicPr>
+          <p:cNvPr id="3" name="Picture 2" descr="ch06_deriv_pvnose_3.png"/>
+          <p:cNvPicPr>
+            <a:picLocks noChangeAspect="1"/>
+          </p:cNvPicPr>
+          <p:nvPr/>
+        </p:nvPicPr>
+        <p:blipFill>
+          <a:blip r:embed="rId2"/>
+          <a:stretch>
+            <a:fillRect/>
+          </a:stretch>
+        </p:blipFill>
+        <p:spPr>
+          <a:xfrm>
+            <a:off x="551856" y="713232"/>
+            <a:ext cx="11087983" cy="5532120"/>
+          </a:xfrm>
+          <a:prstGeom prst="rect">
+            <a:avLst/>
+          </a:prstGeom>
+        </p:spPr>
+      </p:pic>
+      <p:sp>
+        <p:nvSpPr>
+          <p:cNvPr id="4" name="edge:caption"/>
           <p:cNvSpPr txBox="1"/>
           <p:nvPr/>
         </p:nvSpPr>
         <p:spPr>
           <a:xfrm>
-            <a:off x="822960" y="2676875"/>
-            <a:ext cx="10801807" cy="385762"/>
+            <a:off x="228600" y="6300216"/>
+            <a:ext cx="11734495" cy="310896"/>
           </a:xfrm>
           <a:prstGeom prst="rect">
             <a:avLst/>
@@ -12711,325 +11083,24 @@
           </a:bodyPr>
           <a:lstStyle/>
           <a:p>
-            <a:pPr>
-              <a:lnSpc>
-                <a:spcPct val="130000"/>
-              </a:lnSpc>
-            </a:pPr>
-            <a:r>
-              <a:rPr sz="1500">
-                <a:solidFill>
-                  <a:srgbClr val="33221E"/>
-                </a:solidFill>
-                <a:latin typeface="Avenir Next"/>
-                <a:ea typeface="Hiragino Sans"/>
-                <a:cs typeface="Hiragino Sans"/>
-              </a:rPr>
-              <a:t>P = V_sV_r sinδ / X、そして V_r の式を整理すると </a:t>
-            </a:r>
-            <a:r>
-              <a:rPr sz="1500" b="1">
-                <a:solidFill>
-                  <a:srgbClr val="33221E"/>
-                </a:solidFill>
-                <a:latin typeface="Avenir Next"/>
-                <a:ea typeface="Hiragino Sans"/>
-                <a:cs typeface="Hiragino Sans"/>
-              </a:rPr>
-              <a:t>V_r⁴ − V_s²V_r² + (XP)² = 0</a:t>
-            </a:r>
-            <a:r>
-              <a:rPr sz="1500">
-                <a:solidFill>
-                  <a:srgbClr val="33221E"/>
-                </a:solidFill>
-                <a:latin typeface="Avenir Next"/>
-                <a:ea typeface="Hiragino Sans"/>
-                <a:cs typeface="Hiragino Sans"/>
-              </a:rPr>
-              <a:t>。V_r² の 2 次方程式になる。</a:t>
-            </a:r>
-          </a:p>
-        </p:txBody>
-      </p:sp>
-      <p:sp>
-        <p:nvSpPr>
-          <p:cNvPr id="5" name="Rectangle 4"/>
-          <p:cNvSpPr/>
-          <p:nvPr/>
-        </p:nvSpPr>
-        <p:spPr>
-          <a:xfrm>
-            <a:off x="566928" y="3214529"/>
-            <a:ext cx="11057839" cy="9525"/>
-          </a:xfrm>
-          <a:prstGeom prst="rect">
-            <a:avLst/>
-          </a:prstGeom>
-          <a:solidFill>
-            <a:srgbClr val="E5DCCE"/>
-          </a:solidFill>
-          <a:ln>
-            <a:noFill/>
-          </a:ln>
-          <a:effectLst/>
-        </p:spPr>
-        <p:style>
-          <a:lnRef idx="1">
-            <a:schemeClr val="accent1"/>
-          </a:lnRef>
-          <a:fillRef idx="3">
-            <a:schemeClr val="accent1"/>
-          </a:fillRef>
-          <a:effectRef idx="2">
-            <a:schemeClr val="accent1"/>
-          </a:effectRef>
-          <a:fontRef idx="minor">
-            <a:schemeClr val="lt1"/>
-          </a:fontRef>
-        </p:style>
-        <p:txBody>
-          <a:bodyPr rtlCol="0" anchor="ctr"/>
-          <a:lstStyle/>
-          <a:p>
             <a:pPr algn="ctr"/>
-          </a:p>
-        </p:txBody>
-      </p:sp>
-      <p:sp>
-        <p:nvSpPr>
-          <p:cNvPr id="6" name="TextBox 5"/>
-          <p:cNvSpPr txBox="1"/>
-          <p:nvPr/>
-        </p:nvSpPr>
-        <p:spPr>
-          <a:xfrm>
-            <a:off x="566928" y="3391821"/>
-            <a:ext cx="11057839" cy="254000"/>
-          </a:xfrm>
-          <a:prstGeom prst="rect">
-            <a:avLst/>
-          </a:prstGeom>
-          <a:noFill/>
-        </p:spPr>
-        <p:txBody>
-          <a:bodyPr wrap="none" lIns="0" rIns="0" tIns="0" bIns="0">
-            <a:noAutofit/>
-          </a:bodyPr>
-          <a:lstStyle/>
-          <a:p>
-            <a:r>
-              <a:rPr sz="1600" b="1">
-                <a:solidFill>
-                  <a:srgbClr val="5C7268"/>
-                </a:solidFill>
-                <a:latin typeface="Avenir Next"/>
-                <a:ea typeface="Hiragino Sans"/>
-                <a:cs typeface="Hiragino Sans"/>
-              </a:rPr>
-              <a:t>② 解が 2 つ｜判別式 V_s⁴ − 4(XP)² ≥ 0</a:t>
-            </a:r>
-          </a:p>
-        </p:txBody>
-      </p:sp>
-      <p:sp>
-        <p:nvSpPr>
-          <p:cNvPr id="7" name="TextBox 6"/>
-          <p:cNvSpPr txBox="1"/>
-          <p:nvPr/>
-        </p:nvSpPr>
-        <p:spPr>
-          <a:xfrm>
-            <a:off x="822960" y="3683921"/>
-            <a:ext cx="10801807" cy="385762"/>
-          </a:xfrm>
-          <a:prstGeom prst="rect">
-            <a:avLst/>
-          </a:prstGeom>
-          <a:noFill/>
-        </p:spPr>
-        <p:txBody>
-          <a:bodyPr wrap="square" lIns="0" rIns="0" tIns="0" bIns="0">
-            <a:noAutofit/>
-          </a:bodyPr>
-          <a:lstStyle/>
-          <a:p>
-            <a:pPr>
-              <a:lnSpc>
-                <a:spcPct val="130000"/>
-              </a:lnSpc>
-            </a:pPr>
-            <a:r>
-              <a:rPr sz="1500">
-                <a:solidFill>
-                  <a:srgbClr val="33221E"/>
-                </a:solidFill>
-                <a:latin typeface="Avenir Next"/>
-                <a:ea typeface="Hiragino Sans"/>
-                <a:cs typeface="Hiragino Sans"/>
-              </a:rPr>
-              <a:t>上枝（運用点）と下枝（不安定）。同じ P に対して電圧が 2 通りある。</a:t>
-            </a:r>
-          </a:p>
-        </p:txBody>
-      </p:sp>
-      <p:sp>
-        <p:nvSpPr>
-          <p:cNvPr id="8" name="Rectangle 7"/>
-          <p:cNvSpPr/>
-          <p:nvPr/>
-        </p:nvSpPr>
-        <p:spPr>
-          <a:xfrm>
-            <a:off x="566928" y="4221575"/>
-            <a:ext cx="11057839" cy="9525"/>
-          </a:xfrm>
-          <a:prstGeom prst="rect">
-            <a:avLst/>
-          </a:prstGeom>
-          <a:solidFill>
-            <a:srgbClr val="E5DCCE"/>
-          </a:solidFill>
-          <a:ln>
-            <a:noFill/>
-          </a:ln>
-          <a:effectLst/>
-        </p:spPr>
-        <p:style>
-          <a:lnRef idx="1">
-            <a:schemeClr val="accent1"/>
-          </a:lnRef>
-          <a:fillRef idx="3">
-            <a:schemeClr val="accent1"/>
-          </a:fillRef>
-          <a:effectRef idx="2">
-            <a:schemeClr val="accent1"/>
-          </a:effectRef>
-          <a:fontRef idx="minor">
-            <a:schemeClr val="lt1"/>
-          </a:fontRef>
-        </p:style>
-        <p:txBody>
-          <a:bodyPr rtlCol="0" anchor="ctr"/>
-          <a:lstStyle/>
-          <a:p>
-            <a:pPr algn="ctr"/>
-          </a:p>
-        </p:txBody>
-      </p:sp>
-      <p:sp>
-        <p:nvSpPr>
-          <p:cNvPr id="9" name="TextBox 8"/>
-          <p:cNvSpPr txBox="1"/>
-          <p:nvPr/>
-        </p:nvSpPr>
-        <p:spPr>
-          <a:xfrm>
-            <a:off x="566928" y="4398867"/>
-            <a:ext cx="11057839" cy="254000"/>
-          </a:xfrm>
-          <a:prstGeom prst="rect">
-            <a:avLst/>
-          </a:prstGeom>
-          <a:noFill/>
-        </p:spPr>
-        <p:txBody>
-          <a:bodyPr wrap="none" lIns="0" rIns="0" tIns="0" bIns="0">
-            <a:noAutofit/>
-          </a:bodyPr>
-          <a:lstStyle/>
-          <a:p>
-            <a:r>
-              <a:rPr sz="1600" b="1">
-                <a:solidFill>
-                  <a:srgbClr val="5C7268"/>
-                </a:solidFill>
-                <a:latin typeface="Avenir Next"/>
-                <a:ea typeface="Hiragino Sans"/>
-                <a:cs typeface="Hiragino Sans"/>
-              </a:rPr>
-              <a:t>③ 鼻先｜判別式が 0 になる点</a:t>
-            </a:r>
-          </a:p>
-        </p:txBody>
-      </p:sp>
-      <p:sp>
-        <p:nvSpPr>
-          <p:cNvPr id="10" name="TextBox 9"/>
-          <p:cNvSpPr txBox="1"/>
-          <p:nvPr/>
-        </p:nvSpPr>
-        <p:spPr>
-          <a:xfrm>
-            <a:off x="822960" y="4690967"/>
-            <a:ext cx="10801807" cy="385762"/>
-          </a:xfrm>
-          <a:prstGeom prst="rect">
-            <a:avLst/>
-          </a:prstGeom>
-          <a:noFill/>
-        </p:spPr>
-        <p:txBody>
-          <a:bodyPr wrap="square" lIns="0" rIns="0" tIns="0" bIns="0">
-            <a:noAutofit/>
-          </a:bodyPr>
-          <a:lstStyle/>
-          <a:p>
-            <a:pPr>
-              <a:lnSpc>
-                <a:spcPct val="130000"/>
-              </a:lnSpc>
-            </a:pPr>
-            <a:r>
-              <a:rPr sz="1500" b="1">
-                <a:solidFill>
-                  <a:srgbClr val="33221E"/>
-                </a:solidFill>
-                <a:latin typeface="Avenir Next"/>
-                <a:ea typeface="Hiragino Sans"/>
-                <a:cs typeface="Hiragino Sans"/>
-              </a:rPr>
-              <a:t>P_max = V_s²/(2X)</a:t>
-            </a:r>
-            <a:r>
-              <a:rPr sz="1500">
-                <a:solidFill>
-                  <a:srgbClr val="33221E"/>
-                </a:solidFill>
-                <a:latin typeface="Avenir Next"/>
-                <a:ea typeface="Hiragino Sans"/>
-                <a:cs typeface="Hiragino Sans"/>
-              </a:rPr>
-              <a:t>、そのとき </a:t>
-            </a:r>
-            <a:r>
-              <a:rPr sz="1500" b="1">
-                <a:solidFill>
-                  <a:srgbClr val="33221E"/>
-                </a:solidFill>
-                <a:latin typeface="Avenir Next"/>
-                <a:ea typeface="Hiragino Sans"/>
-                <a:cs typeface="Hiragino Sans"/>
-              </a:rPr>
-              <a:t>V_r = V_s/√2 = 0.707 V_s</a:t>
-            </a:r>
-            <a:r>
-              <a:rPr sz="1500">
-                <a:solidFill>
-                  <a:srgbClr val="33221E"/>
-                </a:solidFill>
-                <a:latin typeface="Avenir Next"/>
-                <a:ea typeface="Hiragino Sans"/>
-                <a:cs typeface="Hiragino Sans"/>
-              </a:rPr>
-              <a:t>。これを超えると解が存在しない。</a:t>
-            </a:r>
-          </a:p>
-        </p:txBody>
-      </p:sp>
-      <p:sp>
-        <p:nvSpPr>
-          <p:cNvPr id="11" name="TextBox 10"/>
+            <a:r>
+              <a:rPr sz="1400">
+                <a:solidFill>
+                  <a:srgbClr val="71635B"/>
+                </a:solidFill>
+                <a:latin typeface="Avenir Next"/>
+                <a:ea typeface="Hiragino Sans"/>
+                <a:cs typeface="Hiragino Sans"/>
+              </a:rPr>
+              <a:t>P_max = V_s²/(2X)、そのとき V_r = V_s/√2 = 0.707 V_s。これを超えると解が存在しない。　出典｜コード/fig_ch06.py</a:t>
+            </a:r>
+          </a:p>
+        </p:txBody>
+      </p:sp>
+      <p:sp>
+        <p:nvSpPr>
+          <p:cNvPr id="5" name="TextBox 4"/>
           <p:cNvSpPr txBox="1"/>
           <p:nvPr/>
         </p:nvSpPr>
